--- a/deliverables/interim/PRESENTATION_INTERIM.pptx
+++ b/deliverables/interim/PRESENTATION_INTERIM.pptx
@@ -3866,7 +3866,7 @@
                 </a:solidFill>
                 <a:latin typeface="Calibri"/>
               </a:rPr>
-              <a:t>ссылок подтверждены</a:t>
+              <a:t>ссылок на отчёт верны</a:t>
             </a:r>
           </a:p>
         </p:txBody>
@@ -3905,7 +3905,7 @@
                 </a:solidFill>
                 <a:latin typeface="Calibri"/>
               </a:rPr>
-              <a:t>в первом живом прогоне каждая ссылка на поле отчёта сошлась с данными</a:t>
+              <a:t>в первом живом прогоне каждая ссылка агента на поле отчёта сошлась с данными</a:t>
             </a:r>
           </a:p>
         </p:txBody>
@@ -4066,7 +4066,7 @@
                 </a:solidFill>
                 <a:latin typeface="Calibri"/>
               </a:rPr>
-              <a:t>все компании с зелёной меткой и банкротством или исключением из реестра получили «только на условиях»</a:t>
+              <a:t>каждая компания с зелёной оценкой и банкротством получила вывод «работать только на условиях»</a:t>
             </a:r>
           </a:p>
         </p:txBody>
@@ -4227,7 +4227,7 @@
                 </a:solidFill>
                 <a:latin typeface="Calibri"/>
               </a:rPr>
-              <a:t>на платных моделях; на бесплатной до трёх минут. Половину времени занимает судья, не агент</a:t>
+              <a:t>столько занимает проверка одной компании на платных моделях; на бесплатной до трёх минут</a:t>
             </a:r>
           </a:p>
         </p:txBody>
@@ -4326,7 +4326,7 @@
                 </a:solidFill>
                 <a:latin typeface="Calibri"/>
               </a:rPr>
-              <a:t>Первые десять вопросов вскрыли четыре ошибки стенда и одну ошибку агента. Стенд: судья ходил не на тот адрес, проверка ссылок срезала скобку в адресе поля, уточняющие вопросы задавались без памяти сессии, эталон требовал слово «ЕГРЮЛ» буквально. Агент: пишет «производств нет» там, где надо «в отчёте не найдено», и даёт полную сводку вместо ответа на вопрос. Ошибки стенда закрыты и покрыты тестами, ошибки агента правим после прогона. Итоговая таблица по двум моделям будет к встрече с кейсодателем.</a:t>
+              <a:t>Первые двадцать вопросов нашли больше ошибок в самом тестировании, чем в агенте: судья обращался не по тому адресу, проверка ссылок портила адрес поля, поиск компании не понимал падежи, эталон требовал слово буквально. Всё исправлено и закрыто тестами. У агента три слабости: пишет «нет» там, где правильно «в отчёте не найдено», иногда даёт полную сводку вместо ответа на вопрос, изредка категоричен. Их правим в промпте после прогона. Итоговые цифры по двум моделям покажем на встрече с кейсодателем.</a:t>
             </a:r>
           </a:p>
         </p:txBody>
@@ -4679,7 +4679,7 @@
         <p:spPr>
           <a:xfrm>
             <a:off x="548640" y="1874519"/>
-            <a:ext cx="11100816" cy="658368"/>
+            <a:ext cx="11100816" cy="786384"/>
           </a:xfrm>
           <a:prstGeom prst="rect">
             <a:avLst/>
@@ -4720,8 +4720,8 @@
         </p:nvSpPr>
         <p:spPr>
           <a:xfrm>
-            <a:off x="777240" y="1947672"/>
-            <a:ext cx="5120640" cy="548640"/>
+            <a:off x="777240" y="1965960"/>
+            <a:ext cx="5120640" cy="640080"/>
           </a:xfrm>
           <a:prstGeom prst="rect">
             <a:avLst/>
@@ -4740,13 +4740,13 @@
               </a:spcAft>
             </a:pPr>
             <a:r>
-              <a:rPr sz="1200" b="1">
+              <a:rPr sz="1250" b="1">
                 <a:solidFill>
                   <a:srgbClr val="1B1F3B"/>
                 </a:solidFill>
                 <a:latin typeface="Calibri"/>
               </a:rPr>
-              <a:t>Целевая модель дешёвая и слабее контрольной</a:t>
+              <a:t>Банк выберет дешёвую нейросеть, а она слабее</a:t>
             </a:r>
           </a:p>
         </p:txBody>
@@ -4759,8 +4759,8 @@
         </p:nvSpPr>
         <p:spPr>
           <a:xfrm>
-            <a:off x="6309360" y="1947672"/>
-            <a:ext cx="5120640" cy="548640"/>
+            <a:off x="6309360" y="1965960"/>
+            <a:ext cx="5120640" cy="640080"/>
           </a:xfrm>
           <a:prstGeom prst="rect">
             <a:avLst/>
@@ -4785,7 +4785,7 @@
                 </a:solidFill>
                 <a:latin typeface="Calibri"/>
               </a:rPr>
-              <a:t>ядро считается кодом, модель только формулирует; запасные модели включаются настройкой</a:t>
+              <a:t>всё, что можно посчитать, считает код, нейросеть только формулирует текст; запасные модели включаются настройкой</a:t>
             </a:r>
           </a:p>
         </p:txBody>
@@ -4798,8 +4798,8 @@
         </p:nvSpPr>
         <p:spPr>
           <a:xfrm>
-            <a:off x="548640" y="2569463"/>
-            <a:ext cx="11100816" cy="658368"/>
+            <a:off x="548640" y="2697479"/>
+            <a:ext cx="11100816" cy="786384"/>
           </a:xfrm>
           <a:prstGeom prst="rect">
             <a:avLst/>
@@ -4840,8 +4840,8 @@
         </p:nvSpPr>
         <p:spPr>
           <a:xfrm>
-            <a:off x="777240" y="2642615"/>
-            <a:ext cx="5120640" cy="548640"/>
+            <a:off x="777240" y="2788920"/>
+            <a:ext cx="5120640" cy="640080"/>
           </a:xfrm>
           <a:prstGeom prst="rect">
             <a:avLst/>
@@ -4860,7 +4860,7 @@
               </a:spcAft>
             </a:pPr>
             <a:r>
-              <a:rPr sz="1200" b="1">
+              <a:rPr sz="1250" b="1">
                 <a:solidFill>
                   <a:srgbClr val="1B1F3B"/>
                 </a:solidFill>
@@ -4879,8 +4879,8 @@
         </p:nvSpPr>
         <p:spPr>
           <a:xfrm>
-            <a:off x="6309360" y="2642615"/>
-            <a:ext cx="5120640" cy="548640"/>
+            <a:off x="6309360" y="2788920"/>
+            <a:ext cx="5120640" cy="640080"/>
           </a:xfrm>
           <a:prstGeom prst="rect">
             <a:avLst/>
@@ -4905,7 +4905,7 @@
                 </a:solidFill>
                 <a:latin typeface="Calibri"/>
               </a:rPr>
-              <a:t>два варианта готовы к показу; решение с кейсодателем на ближайшей встрече</a:t>
+              <a:t>два варианта готовы к показу; решение принимаем вместе с кейсодателем на ближайшей встрече</a:t>
             </a:r>
           </a:p>
         </p:txBody>
@@ -4918,8 +4918,8 @@
         </p:nvSpPr>
         <p:spPr>
           <a:xfrm>
-            <a:off x="548640" y="3264408"/>
-            <a:ext cx="11100816" cy="658368"/>
+            <a:off x="548640" y="3520439"/>
+            <a:ext cx="11100816" cy="786384"/>
           </a:xfrm>
           <a:prstGeom prst="rect">
             <a:avLst/>
@@ -4960,8 +4960,8 @@
         </p:nvSpPr>
         <p:spPr>
           <a:xfrm>
-            <a:off x="777240" y="3337560"/>
-            <a:ext cx="5120640" cy="548640"/>
+            <a:off x="777240" y="3611879"/>
+            <a:ext cx="5120640" cy="640080"/>
           </a:xfrm>
           <a:prstGeom prst="rect">
             <a:avLst/>
@@ -4980,13 +4980,13 @@
               </a:spcAft>
             </a:pPr>
             <a:r>
-              <a:rPr sz="1200" b="1">
+              <a:rPr sz="1250" b="1">
                 <a:solidFill>
                   <a:srgbClr val="1B1F3B"/>
                 </a:solidFill>
                 <a:latin typeface="Calibri"/>
               </a:rPr>
-              <a:t>Работаем на выгрузке, а не на живом API банка</a:t>
+              <a:t>Работаем на выгрузке, а не на живых отчётах банка</a:t>
             </a:r>
           </a:p>
         </p:txBody>
@@ -4999,8 +4999,8 @@
         </p:nvSpPr>
         <p:spPr>
           <a:xfrm>
-            <a:off x="6309360" y="3337560"/>
-            <a:ext cx="5120640" cy="548640"/>
+            <a:off x="6309360" y="3611879"/>
+            <a:ext cx="5120640" cy="640080"/>
           </a:xfrm>
           <a:prstGeom prst="rect">
             <a:avLst/>
@@ -5025,7 +5025,7 @@
                 </a:solidFill>
                 <a:latin typeface="Calibri"/>
               </a:rPr>
-              <a:t>схема плавающая: секции приходят и уходят; «нет секции» и «пустая секция» различаются в коде</a:t>
+              <a:t>в живых отчётах набор разделов может отличаться; код различает «раздела нет» и «раздел пустой» и не путает отсутствие данных с отсутствием нарушений</a:t>
             </a:r>
           </a:p>
         </p:txBody>
@@ -5038,8 +5038,8 @@
         </p:nvSpPr>
         <p:spPr>
           <a:xfrm>
-            <a:off x="548640" y="3959352"/>
-            <a:ext cx="11100816" cy="658368"/>
+            <a:off x="548640" y="4343400"/>
+            <a:ext cx="11100816" cy="786384"/>
           </a:xfrm>
           <a:prstGeom prst="rect">
             <a:avLst/>
@@ -5080,8 +5080,8 @@
         </p:nvSpPr>
         <p:spPr>
           <a:xfrm>
-            <a:off x="777240" y="4032504"/>
-            <a:ext cx="5120640" cy="548640"/>
+            <a:off x="777240" y="4434840"/>
+            <a:ext cx="5120640" cy="640080"/>
           </a:xfrm>
           <a:prstGeom prst="rect">
             <a:avLst/>
@@ -5100,13 +5100,13 @@
               </a:spcAft>
             </a:pPr>
             <a:r>
-              <a:rPr sz="1200" b="1">
+              <a:rPr sz="1250" b="1">
                 <a:solidFill>
                   <a:srgbClr val="1B1F3B"/>
                 </a:solidFill>
                 <a:latin typeface="Calibri"/>
               </a:rPr>
-              <a:t>Модель-судья тоже ошибается</a:t>
+              <a:t>Нейросеть-судья тоже ошибается</a:t>
             </a:r>
           </a:p>
         </p:txBody>
@@ -5119,8 +5119,8 @@
         </p:nvSpPr>
         <p:spPr>
           <a:xfrm>
-            <a:off x="6309360" y="4032504"/>
-            <a:ext cx="5120640" cy="548640"/>
+            <a:off x="6309360" y="4434840"/>
+            <a:ext cx="5120640" cy="640080"/>
           </a:xfrm>
           <a:prstGeom prst="rect">
             <a:avLst/>
@@ -5145,7 +5145,7 @@
                 </a:solidFill>
                 <a:latin typeface="Calibri"/>
               </a:rPr>
-              <a:t>рядом проверки кодом, повторные прогоны, разбор каждого провала руками</a:t>
+              <a:t>рядом с ней автоматические проверки кодом, повторные прогоны и разбор каждого провала руками</a:t>
             </a:r>
           </a:p>
         </p:txBody>
@@ -5158,8 +5158,8 @@
         </p:nvSpPr>
         <p:spPr>
           <a:xfrm>
-            <a:off x="548640" y="4654296"/>
-            <a:ext cx="11100816" cy="658368"/>
+            <a:off x="548640" y="5166360"/>
+            <a:ext cx="11100816" cy="786384"/>
           </a:xfrm>
           <a:prstGeom prst="rect">
             <a:avLst/>
@@ -5200,8 +5200,8 @@
         </p:nvSpPr>
         <p:spPr>
           <a:xfrm>
-            <a:off x="777240" y="4727448"/>
-            <a:ext cx="5120640" cy="548640"/>
+            <a:off x="777240" y="5257800"/>
+            <a:ext cx="5120640" cy="640080"/>
           </a:xfrm>
           <a:prstGeom prst="rect">
             <a:avLst/>
@@ -5220,13 +5220,13 @@
               </a:spcAft>
             </a:pPr>
             <a:r>
-              <a:rPr sz="1200" b="1">
+              <a:rPr sz="1250" b="1">
                 <a:solidFill>
                   <a:srgbClr val="1B1F3B"/>
                 </a:solidFill>
                 <a:latin typeface="Calibri"/>
               </a:rPr>
-              <a:t>Интерфейс банка скрывает жёлтый и красный ЗСК</a:t>
+              <a:t>Интерфейс банка не показывает жёлтую и красную оценку ЗСК</a:t>
             </a:r>
           </a:p>
         </p:txBody>
@@ -5239,8 +5239,8 @@
         </p:nvSpPr>
         <p:spPr>
           <a:xfrm>
-            <a:off x="6309360" y="4727448"/>
-            <a:ext cx="5120640" cy="548640"/>
+            <a:off x="6309360" y="5257800"/>
+            <a:ext cx="5120640" cy="640080"/>
           </a:xfrm>
           <a:prstGeom prst="rect">
             <a:avLst/>
@@ -5265,127 +5265,7 @@
                 </a:solidFill>
                 <a:latin typeface="Calibri"/>
               </a:rPr>
-              <a:t>агент не раскрывает то, что скрыто намеренно; как говорить об этом, уточняем у кейсодателя</a:t>
-            </a:r>
-          </a:p>
-        </p:txBody>
-      </p:sp>
-      <p:sp>
-        <p:nvSpPr>
-          <p:cNvPr id="25" name="Rectangle 24"/>
-          <p:cNvSpPr/>
-          <p:nvPr/>
-        </p:nvSpPr>
-        <p:spPr>
-          <a:xfrm>
-            <a:off x="548640" y="5349240"/>
-            <a:ext cx="11100816" cy="658368"/>
-          </a:xfrm>
-          <a:prstGeom prst="rect">
-            <a:avLst/>
-          </a:prstGeom>
-          <a:solidFill>
-            <a:srgbClr val="FFFFFF"/>
-          </a:solidFill>
-          <a:ln>
-            <a:noFill/>
-          </a:ln>
-          <a:effectLst/>
-        </p:spPr>
-        <p:style>
-          <a:lnRef idx="1">
-            <a:schemeClr val="accent1"/>
-          </a:lnRef>
-          <a:fillRef idx="3">
-            <a:schemeClr val="accent1"/>
-          </a:fillRef>
-          <a:effectRef idx="2">
-            <a:schemeClr val="accent1"/>
-          </a:effectRef>
-          <a:fontRef idx="minor">
-            <a:schemeClr val="lt1"/>
-          </a:fontRef>
-        </p:style>
-        <p:txBody>
-          <a:bodyPr rtlCol="0" anchor="ctr"/>
-          <a:lstStyle/>
-          <a:p/>
-        </p:txBody>
-      </p:sp>
-      <p:sp>
-        <p:nvSpPr>
-          <p:cNvPr id="26" name="TextBox 25"/>
-          <p:cNvSpPr txBox="1"/>
-          <p:nvPr/>
-        </p:nvSpPr>
-        <p:spPr>
-          <a:xfrm>
-            <a:off x="777240" y="5422392"/>
-            <a:ext cx="5120640" cy="548640"/>
-          </a:xfrm>
-          <a:prstGeom prst="rect">
-            <a:avLst/>
-          </a:prstGeom>
-          <a:noFill/>
-        </p:spPr>
-        <p:txBody>
-          <a:bodyPr wrap="square" lIns="0" rIns="0" tIns="18288" bIns="18288" anchor="t">
-            <a:spAutoFit/>
-          </a:bodyPr>
-          <a:lstStyle/>
-          <a:p>
-            <a:pPr algn="l">
-              <a:spcAft>
-                <a:spcPts val="400"/>
-              </a:spcAft>
-            </a:pPr>
-            <a:r>
-              <a:rPr sz="1200" b="1">
-                <a:solidFill>
-                  <a:srgbClr val="1B1F3B"/>
-                </a:solidFill>
-                <a:latin typeface="Calibri"/>
-              </a:rPr>
-              <a:t>В выгрузке есть ИНН физлиц</a:t>
-            </a:r>
-          </a:p>
-        </p:txBody>
-      </p:sp>
-      <p:sp>
-        <p:nvSpPr>
-          <p:cNvPr id="27" name="TextBox 26"/>
-          <p:cNvSpPr txBox="1"/>
-          <p:nvPr/>
-        </p:nvSpPr>
-        <p:spPr>
-          <a:xfrm>
-            <a:off x="6309360" y="5422392"/>
-            <a:ext cx="5120640" cy="548640"/>
-          </a:xfrm>
-          <a:prstGeom prst="rect">
-            <a:avLst/>
-          </a:prstGeom>
-          <a:noFill/>
-        </p:spPr>
-        <p:txBody>
-          <a:bodyPr wrap="square" lIns="0" rIns="0" tIns="18288" bIns="18288" anchor="t">
-            <a:spAutoFit/>
-          </a:bodyPr>
-          <a:lstStyle/>
-          <a:p>
-            <a:pPr algn="l">
-              <a:spcAft>
-                <a:spcPts val="400"/>
-              </a:spcAft>
-            </a:pPr>
-            <a:r>
-              <a:rPr sz="1150" b="0">
-                <a:solidFill>
-                  <a:srgbClr val="1A1A1A"/>
-                </a:solidFill>
-                <a:latin typeface="Calibri"/>
-              </a:rPr>
-              <a:t>репозиторий закрыт до ответа кейсодателя о публикации</a:t>
+              <a:t>агент не раскрывает то, что интерфейс скрывает намеренно; как говорить об этом, уточняем у кейсодателя</a:t>
             </a:r>
           </a:p>
         </p:txBody>
@@ -5724,7 +5604,7 @@
                 </a:solidFill>
                 <a:latin typeface="Calibri"/>
               </a:rPr>
-              <a:t>Показать кейсодателю два варианта первого экрана</a:t>
+              <a:t>Сравнение нескольких контрагентов</a:t>
             </a:r>
           </a:p>
           <a:p>
@@ -5740,7 +5620,7 @@
                 </a:solidFill>
                 <a:latin typeface="Calibri"/>
               </a:rPr>
-              <a:t>и зафиксировать, где живёт агент, с чего начинается проверка и как говорить о ЗСК</a:t>
+              <a:t>пользователь загружает несколько отчётов и получает, кого выбрать и с кем не стоит; инструмент готов, дописываем сценарий и интерфейс</a:t>
             </a:r>
           </a:p>
         </p:txBody>
@@ -5860,7 +5740,7 @@
                 </a:solidFill>
                 <a:latin typeface="Calibri"/>
               </a:rPr>
-              <a:t>Дописать прогоны и собрать таблицу по двум моделям</a:t>
+              <a:t>Показать кейсодателю два варианта первого экрана</a:t>
             </a:r>
           </a:p>
           <a:p>
@@ -5876,7 +5756,7 @@
                 </a:solidFill>
                 <a:latin typeface="Calibri"/>
               </a:rPr>
-              <a:t>затем повторы, чтобы отделить случайность от системных ошибок</a:t>
+              <a:t>и решить, где живёт агент, с чего начинается проверка и как говорить о ЗСК</a:t>
             </a:r>
           </a:p>
         </p:txBody>
@@ -5996,7 +5876,7 @@
                 </a:solidFill>
                 <a:latin typeface="Calibri"/>
               </a:rPr>
-              <a:t>Поправить агента по итогам прогонов</a:t>
+              <a:t>Закончить прогоны и показать цифры по двум моделям</a:t>
             </a:r>
           </a:p>
           <a:p>
@@ -6012,7 +5892,7 @@
                 </a:solidFill>
                 <a:latin typeface="Calibri"/>
               </a:rPr>
-              <a:t>два-три факта вместо семи, без категоричных фраз, ответ по существу на уточняющий вопрос</a:t>
+              <a:t>затем повторные прогоны, чтобы отделить случайность от системных ошибок</a:t>
             </a:r>
           </a:p>
         </p:txBody>
@@ -6132,7 +6012,7 @@
                 </a:solidFill>
                 <a:latin typeface="Calibri"/>
               </a:rPr>
-              <a:t>Первый экран и чат в интерфейсе</a:t>
+              <a:t>Поправить агента по итогам прогонов</a:t>
             </a:r>
           </a:p>
           <a:p>
@@ -6148,7 +6028,7 @@
                 </a:solidFill>
                 <a:latin typeface="Calibri"/>
               </a:rPr>
-              <a:t>в выбранном варианте; сравнение нескольких компаний в одной сессии</a:t>
+              <a:t>два-три факта вместо семи, без категоричных фраз, ответ по существу на уточняющий вопрос</a:t>
             </a:r>
           </a:p>
         </p:txBody>
@@ -6268,7 +6148,7 @@
                 </a:solidFill>
                 <a:latin typeface="Calibri"/>
               </a:rPr>
-              <a:t>Приёмка по сценариям кейсодателя</a:t>
+              <a:t>Интерфейс в выбранном варианте и приёмка по сценариям кейсодателя</a:t>
             </a:r>
           </a:p>
           <a:p>
@@ -6284,7 +6164,7 @@
                 </a:solidFill>
                 <a:latin typeface="Calibri"/>
               </a:rPr>
-              <a:t>и финальные материалы: презентация, описание, демо</a:t>
+              <a:t>затем финальные материалы: презентация, описание, демо</a:t>
             </a:r>
           </a:p>
         </p:txBody>
@@ -7382,7 +7262,7 @@
                 </a:solidFill>
                 <a:latin typeface="Calibri"/>
               </a:rPr>
-              <a:t>Проблема: отчёт есть, вывода нет</a:t>
+              <a:t>Проблема</a:t>
             </a:r>
           </a:p>
         </p:txBody>
@@ -7435,11 +7315,11 @@
         <p:spPr>
           <a:xfrm>
             <a:off x="548640" y="1463040"/>
-            <a:ext cx="3566160" cy="2148840"/>
+            <a:ext cx="3566160" cy="2331720"/>
           </a:xfrm>
           <a:prstGeom prst="roundRect">
             <a:avLst>
-              <a:gd name="adj" fmla="val 5106"/>
+              <a:gd name="adj" fmla="val 4705"/>
             </a:avLst>
           </a:prstGeom>
           <a:solidFill>
@@ -7478,129 +7358,67 @@
         </p:nvSpPr>
         <p:spPr>
           <a:xfrm>
-            <a:off x="548640" y="1691640"/>
-            <a:ext cx="3566160" cy="914400"/>
-          </a:xfrm>
-          <a:prstGeom prst="rect">
-            <a:avLst/>
-          </a:prstGeom>
-          <a:noFill/>
-        </p:spPr>
-        <p:txBody>
-          <a:bodyPr wrap="square" lIns="0" rIns="0" tIns="18288" bIns="18288" anchor="t">
-            <a:spAutoFit/>
-          </a:bodyPr>
-          <a:lstStyle/>
-          <a:p>
-            <a:pPr algn="ctr">
-              <a:spcAft>
-                <a:spcPts val="400"/>
-              </a:spcAft>
-            </a:pPr>
-            <a:r>
-              <a:rPr sz="4000" b="1">
+            <a:off x="777240" y="1645920"/>
+            <a:ext cx="3108960" cy="2057400"/>
+          </a:xfrm>
+          <a:prstGeom prst="rect">
+            <a:avLst/>
+          </a:prstGeom>
+          <a:noFill/>
+        </p:spPr>
+        <p:txBody>
+          <a:bodyPr wrap="square" lIns="0" rIns="0" tIns="18288" bIns="18288" anchor="t">
+            <a:spAutoFit/>
+          </a:bodyPr>
+          <a:lstStyle/>
+          <a:p>
+            <a:pPr algn="l">
+              <a:spcAft>
+                <a:spcPts val="600"/>
+              </a:spcAft>
+            </a:pPr>
+            <a:r>
+              <a:rPr sz="1500" b="1">
                 <a:solidFill>
                   <a:srgbClr val="1B1F3B"/>
                 </a:solidFill>
                 <a:latin typeface="Calibri"/>
               </a:rPr>
-              <a:t>9</a:t>
-            </a:r>
-          </a:p>
-        </p:txBody>
-      </p:sp>
-      <p:sp>
-        <p:nvSpPr>
-          <p:cNvPr id="9" name="TextBox 8"/>
-          <p:cNvSpPr txBox="1"/>
-          <p:nvPr/>
-        </p:nvSpPr>
-        <p:spPr>
-          <a:xfrm>
-            <a:off x="548640" y="2651760"/>
-            <a:ext cx="3566160" cy="320040"/>
-          </a:xfrm>
-          <a:prstGeom prst="rect">
-            <a:avLst/>
-          </a:prstGeom>
-          <a:noFill/>
-        </p:spPr>
-        <p:txBody>
-          <a:bodyPr wrap="square" lIns="0" rIns="0" tIns="18288" bIns="18288" anchor="t">
-            <a:spAutoFit/>
-          </a:bodyPr>
-          <a:lstStyle/>
-          <a:p>
-            <a:pPr algn="ctr">
-              <a:spcAft>
-                <a:spcPts val="400"/>
-              </a:spcAft>
-            </a:pPr>
-            <a:r>
-              <a:rPr sz="1300" b="1">
-                <a:solidFill>
-                  <a:srgbClr val="EF3124"/>
-                </a:solidFill>
-                <a:latin typeface="Calibri"/>
-              </a:rPr>
-              <a:t>разделов в отчёте</a:t>
-            </a:r>
-          </a:p>
-        </p:txBody>
-      </p:sp>
-      <p:sp>
-        <p:nvSpPr>
-          <p:cNvPr id="10" name="TextBox 9"/>
-          <p:cNvSpPr txBox="1"/>
-          <p:nvPr/>
-        </p:nvSpPr>
-        <p:spPr>
-          <a:xfrm>
-            <a:off x="777240" y="2999232"/>
-            <a:ext cx="3108960" cy="502920"/>
-          </a:xfrm>
-          <a:prstGeom prst="rect">
-            <a:avLst/>
-          </a:prstGeom>
-          <a:noFill/>
-        </p:spPr>
-        <p:txBody>
-          <a:bodyPr wrap="square" lIns="0" rIns="0" tIns="18288" bIns="18288" anchor="t">
-            <a:spAutoFit/>
-          </a:bodyPr>
-          <a:lstStyle/>
-          <a:p>
-            <a:pPr algn="ctr">
-              <a:spcAft>
-                <a:spcPts val="400"/>
-              </a:spcAft>
-            </a:pPr>
-            <a:r>
-              <a:rPr sz="1100" b="0">
-                <a:solidFill>
-                  <a:srgbClr val="5A6470"/>
-                </a:solidFill>
-                <a:latin typeface="Calibri"/>
-              </a:rPr>
-              <a:t>финансы, суды, приставы, реестры, признаки банка. Предприниматель читает всё сам или смотрит только на метку риска сверху</a:t>
-            </a:r>
-          </a:p>
-        </p:txBody>
-      </p:sp>
-      <p:sp>
-        <p:nvSpPr>
-          <p:cNvPr id="11" name="Rounded Rectangle 10"/>
+              <a:t>Отчёт большой, суть искать самому</a:t>
+            </a:r>
+          </a:p>
+          <a:p>
+            <a:pPr algn="l">
+              <a:spcAft>
+                <a:spcPts val="400"/>
+              </a:spcAft>
+            </a:pPr>
+            <a:r>
+              <a:rPr sz="1200" b="0">
+                <a:solidFill>
+                  <a:srgbClr val="1A1A1A"/>
+                </a:solidFill>
+                <a:latin typeface="Calibri"/>
+              </a:rPr>
+              <a:t>Отчёт банка о контрагенте: девять разделов, десятки страниц. Финансы, суды, долги у приставов, реестры. Предприниматель читает всё сам или смотрит только на оценку риска сверху.</a:t>
+            </a:r>
+          </a:p>
+        </p:txBody>
+      </p:sp>
+      <p:sp>
+        <p:nvSpPr>
+          <p:cNvPr id="9" name="Rounded Rectangle 8"/>
           <p:cNvSpPr/>
           <p:nvPr/>
         </p:nvSpPr>
         <p:spPr>
           <a:xfrm>
             <a:off x="4315968" y="1463040"/>
-            <a:ext cx="3566160" cy="2148840"/>
+            <a:ext cx="3566160" cy="2331720"/>
           </a:xfrm>
           <a:prstGeom prst="roundRect">
             <a:avLst>
-              <a:gd name="adj" fmla="val 5106"/>
+              <a:gd name="adj" fmla="val 4705"/>
             </a:avLst>
           </a:prstGeom>
           <a:solidFill>
@@ -7633,135 +7451,73 @@
       </p:sp>
       <p:sp>
         <p:nvSpPr>
-          <p:cNvPr id="12" name="TextBox 11"/>
-          <p:cNvSpPr txBox="1"/>
-          <p:nvPr/>
-        </p:nvSpPr>
-        <p:spPr>
-          <a:xfrm>
-            <a:off x="4315968" y="1691640"/>
-            <a:ext cx="3566160" cy="914400"/>
-          </a:xfrm>
-          <a:prstGeom prst="rect">
-            <a:avLst/>
-          </a:prstGeom>
-          <a:noFill/>
-        </p:spPr>
-        <p:txBody>
-          <a:bodyPr wrap="square" lIns="0" rIns="0" tIns="18288" bIns="18288" anchor="t">
-            <a:spAutoFit/>
-          </a:bodyPr>
-          <a:lstStyle/>
-          <a:p>
-            <a:pPr algn="ctr">
-              <a:spcAft>
-                <a:spcPts val="400"/>
-              </a:spcAft>
-            </a:pPr>
-            <a:r>
-              <a:rPr sz="4000" b="1">
+          <p:cNvPr id="10" name="TextBox 9"/>
+          <p:cNvSpPr txBox="1"/>
+          <p:nvPr/>
+        </p:nvSpPr>
+        <p:spPr>
+          <a:xfrm>
+            <a:off x="4544568" y="1645920"/>
+            <a:ext cx="3108960" cy="2057400"/>
+          </a:xfrm>
+          <a:prstGeom prst="rect">
+            <a:avLst/>
+          </a:prstGeom>
+          <a:noFill/>
+        </p:spPr>
+        <p:txBody>
+          <a:bodyPr wrap="square" lIns="0" rIns="0" tIns="18288" bIns="18288" anchor="t">
+            <a:spAutoFit/>
+          </a:bodyPr>
+          <a:lstStyle/>
+          <a:p>
+            <a:pPr algn="l">
+              <a:spcAft>
+                <a:spcPts val="600"/>
+              </a:spcAft>
+            </a:pPr>
+            <a:r>
+              <a:rPr sz="1500" b="1">
                 <a:solidFill>
                   <a:srgbClr val="1B1F3B"/>
                 </a:solidFill>
                 <a:latin typeface="Calibri"/>
               </a:rPr>
-              <a:t>6 из 200</a:t>
-            </a:r>
-          </a:p>
-        </p:txBody>
-      </p:sp>
-      <p:sp>
-        <p:nvSpPr>
-          <p:cNvPr id="13" name="TextBox 12"/>
-          <p:cNvSpPr txBox="1"/>
-          <p:nvPr/>
-        </p:nvSpPr>
-        <p:spPr>
-          <a:xfrm>
-            <a:off x="4315968" y="2651760"/>
-            <a:ext cx="3566160" cy="320040"/>
-          </a:xfrm>
-          <a:prstGeom prst="rect">
-            <a:avLst/>
-          </a:prstGeom>
-          <a:noFill/>
-        </p:spPr>
-        <p:txBody>
-          <a:bodyPr wrap="square" lIns="0" rIns="0" tIns="18288" bIns="18288" anchor="t">
-            <a:spAutoFit/>
-          </a:bodyPr>
-          <a:lstStyle/>
-          <a:p>
-            <a:pPr algn="ctr">
-              <a:spcAft>
-                <a:spcPts val="400"/>
-              </a:spcAft>
-            </a:pPr>
-            <a:r>
-              <a:rPr sz="1300" b="1">
-                <a:solidFill>
-                  <a:srgbClr val="EF3124"/>
-                </a:solidFill>
-                <a:latin typeface="Calibri"/>
-              </a:rPr>
-              <a:t>компаний с зелёной меткой</a:t>
-            </a:r>
-          </a:p>
-        </p:txBody>
-      </p:sp>
-      <p:sp>
-        <p:nvSpPr>
-          <p:cNvPr id="14" name="TextBox 13"/>
-          <p:cNvSpPr txBox="1"/>
-          <p:nvPr/>
-        </p:nvSpPr>
-        <p:spPr>
-          <a:xfrm>
-            <a:off x="4544568" y="2999232"/>
-            <a:ext cx="3108960" cy="502920"/>
-          </a:xfrm>
-          <a:prstGeom prst="rect">
-            <a:avLst/>
-          </a:prstGeom>
-          <a:noFill/>
-        </p:spPr>
-        <p:txBody>
-          <a:bodyPr wrap="square" lIns="0" rIns="0" tIns="18288" bIns="18288" anchor="t">
-            <a:spAutoFit/>
-          </a:bodyPr>
-          <a:lstStyle/>
-          <a:p>
-            <a:pPr algn="ctr">
-              <a:spcAft>
-                <a:spcPts val="400"/>
-              </a:spcAft>
-            </a:pPr>
-            <a:r>
-              <a:rPr sz="1100" b="0">
-                <a:solidFill>
-                  <a:srgbClr val="5A6470"/>
-                </a:solidFill>
-                <a:latin typeface="Calibri"/>
-              </a:rPr>
-              <a:t>уже банкроты или исключаются из реестра. Это видно в отчёте, но готовые рекомендации об этом молчат</a:t>
-            </a:r>
-          </a:p>
-        </p:txBody>
-      </p:sp>
-      <p:sp>
-        <p:nvSpPr>
-          <p:cNvPr id="15" name="Rounded Rectangle 14"/>
+              <a:t>Главное может быть спрятано внизу</a:t>
+            </a:r>
+          </a:p>
+          <a:p>
+            <a:pPr algn="l">
+              <a:spcAft>
+                <a:spcPts val="400"/>
+              </a:spcAft>
+            </a:pPr>
+            <a:r>
+              <a:rPr sz="1200" b="0">
+                <a:solidFill>
+                  <a:srgbClr val="1A1A1A"/>
+                </a:solidFill>
+                <a:latin typeface="Calibri"/>
+              </a:rPr>
+              <a:t>У 6 компаний из 200 в тестовой выгрузке оценка сверху зелёная, а внизу отчёта написано: банкрот или исключается из реестра. Готовые подсказки в отчёте об этом молчат.</a:t>
+            </a:r>
+          </a:p>
+        </p:txBody>
+      </p:sp>
+      <p:sp>
+        <p:nvSpPr>
+          <p:cNvPr id="11" name="Rounded Rectangle 10"/>
           <p:cNvSpPr/>
           <p:nvPr/>
         </p:nvSpPr>
         <p:spPr>
           <a:xfrm>
             <a:off x="8083296" y="1463040"/>
-            <a:ext cx="3566160" cy="2148840"/>
+            <a:ext cx="3566160" cy="2331720"/>
           </a:xfrm>
           <a:prstGeom prst="roundRect">
             <a:avLst>
-              <a:gd name="adj" fmla="val 5106"/>
+              <a:gd name="adj" fmla="val 4705"/>
             </a:avLst>
           </a:prstGeom>
           <a:solidFill>
@@ -7794,135 +7550,73 @@
       </p:sp>
       <p:sp>
         <p:nvSpPr>
-          <p:cNvPr id="16" name="TextBox 15"/>
-          <p:cNvSpPr txBox="1"/>
-          <p:nvPr/>
-        </p:nvSpPr>
-        <p:spPr>
-          <a:xfrm>
-            <a:off x="8083296" y="1691640"/>
-            <a:ext cx="3566160" cy="914400"/>
-          </a:xfrm>
-          <a:prstGeom prst="rect">
-            <a:avLst/>
-          </a:prstGeom>
-          <a:noFill/>
-        </p:spPr>
-        <p:txBody>
-          <a:bodyPr wrap="square" lIns="0" rIns="0" tIns="18288" bIns="18288" anchor="t">
-            <a:spAutoFit/>
-          </a:bodyPr>
-          <a:lstStyle/>
-          <a:p>
-            <a:pPr algn="ctr">
-              <a:spcAft>
-                <a:spcPts val="400"/>
-              </a:spcAft>
-            </a:pPr>
-            <a:r>
-              <a:rPr sz="4000" b="1">
+          <p:cNvPr id="12" name="TextBox 11"/>
+          <p:cNvSpPr txBox="1"/>
+          <p:nvPr/>
+        </p:nvSpPr>
+        <p:spPr>
+          <a:xfrm>
+            <a:off x="8311896" y="1645920"/>
+            <a:ext cx="3108960" cy="2057400"/>
+          </a:xfrm>
+          <a:prstGeom prst="rect">
+            <a:avLst/>
+          </a:prstGeom>
+          <a:noFill/>
+        </p:spPr>
+        <p:txBody>
+          <a:bodyPr wrap="square" lIns="0" rIns="0" tIns="18288" bIns="18288" anchor="t">
+            <a:spAutoFit/>
+          </a:bodyPr>
+          <a:lstStyle/>
+          <a:p>
+            <a:pPr algn="l">
+              <a:spcAft>
+                <a:spcPts val="600"/>
+              </a:spcAft>
+            </a:pPr>
+            <a:r>
+              <a:rPr sz="1500" b="1">
                 <a:solidFill>
                   <a:srgbClr val="1B1F3B"/>
                 </a:solidFill>
                 <a:latin typeface="Calibri"/>
               </a:rPr>
-              <a:t>≈ 16</a:t>
-            </a:r>
-          </a:p>
-        </p:txBody>
-      </p:sp>
-      <p:sp>
-        <p:nvSpPr>
-          <p:cNvPr id="17" name="TextBox 16"/>
-          <p:cNvSpPr txBox="1"/>
-          <p:nvPr/>
-        </p:nvSpPr>
-        <p:spPr>
-          <a:xfrm>
-            <a:off x="8083296" y="2651760"/>
-            <a:ext cx="3566160" cy="320040"/>
-          </a:xfrm>
-          <a:prstGeom prst="rect">
-            <a:avLst/>
-          </a:prstGeom>
-          <a:noFill/>
-        </p:spPr>
-        <p:txBody>
-          <a:bodyPr wrap="square" lIns="0" rIns="0" tIns="18288" bIns="18288" anchor="t">
-            <a:spAutoFit/>
-          </a:bodyPr>
-          <a:lstStyle/>
-          <a:p>
-            <a:pPr algn="ctr">
-              <a:spcAft>
-                <a:spcPts val="400"/>
-              </a:spcAft>
-            </a:pPr>
-            <a:r>
-              <a:rPr sz="1300" b="1">
-                <a:solidFill>
-                  <a:srgbClr val="EF3124"/>
-                </a:solidFill>
-                <a:latin typeface="Calibri"/>
-              </a:rPr>
-              <a:t>позитивных формулировок на карточку</a:t>
-            </a:r>
-          </a:p>
-        </p:txBody>
-      </p:sp>
-      <p:sp>
-        <p:nvSpPr>
-          <p:cNvPr id="18" name="TextBox 17"/>
-          <p:cNvSpPr txBox="1"/>
-          <p:nvPr/>
-        </p:nvSpPr>
-        <p:spPr>
-          <a:xfrm>
-            <a:off x="8311896" y="2999232"/>
-            <a:ext cx="3108960" cy="502920"/>
-          </a:xfrm>
-          <a:prstGeom prst="rect">
-            <a:avLst/>
-          </a:prstGeom>
-          <a:noFill/>
-        </p:spPr>
-        <p:txBody>
-          <a:bodyPr wrap="square" lIns="0" rIns="0" tIns="18288" bIns="18288" anchor="t">
-            <a:spAutoFit/>
-          </a:bodyPr>
-          <a:lstStyle/>
-          <a:p>
-            <a:pPr algn="ctr">
-              <a:spcAft>
-                <a:spcPts val="400"/>
-              </a:spcAft>
-            </a:pPr>
-            <a:r>
-              <a:rPr sz="1100" b="0">
-                <a:solidFill>
-                  <a:srgbClr val="5A6470"/>
-                </a:solidFill>
-                <a:latin typeface="Calibri"/>
-              </a:rPr>
-              <a:t>«блокировок нет», «в реестрах не найден». Они не помогают решить, давать ли отсрочку</a:t>
-            </a:r>
-          </a:p>
-        </p:txBody>
-      </p:sp>
-      <p:sp>
-        <p:nvSpPr>
-          <p:cNvPr id="19" name="Rounded Rectangle 18"/>
+              <a:t>Контрагентов часто несколько</a:t>
+            </a:r>
+          </a:p>
+          <a:p>
+            <a:pPr algn="l">
+              <a:spcAft>
+                <a:spcPts val="400"/>
+              </a:spcAft>
+            </a:pPr>
+            <a:r>
+              <a:rPr sz="1200" b="0">
+                <a:solidFill>
+                  <a:srgbClr val="1A1A1A"/>
+                </a:solidFill>
+                <a:latin typeface="Calibri"/>
+              </a:rPr>
+              <a:t>Выбирая поставщика, предприниматель получает несколько отчётов. Сравнивать их вручную ещё дольше, а ответ нужен простой: с кем работать, с кем на условиях, с кем не стоит.</a:t>
+            </a:r>
+          </a:p>
+        </p:txBody>
+      </p:sp>
+      <p:sp>
+        <p:nvSpPr>
+          <p:cNvPr id="13" name="Rounded Rectangle 12"/>
           <p:cNvSpPr/>
           <p:nvPr/>
         </p:nvSpPr>
         <p:spPr>
           <a:xfrm>
-            <a:off x="548640" y="3977639"/>
-            <a:ext cx="11100816" cy="2057400"/>
+            <a:off x="548640" y="4114800"/>
+            <a:ext cx="11100816" cy="1920240"/>
           </a:xfrm>
           <a:prstGeom prst="roundRect">
             <a:avLst>
-              <a:gd name="adj" fmla="val 5333"/>
+              <a:gd name="adj" fmla="val 5714"/>
             </a:avLst>
           </a:prstGeom>
           <a:solidFill>
@@ -7955,14 +7649,14 @@
       </p:sp>
       <p:sp>
         <p:nvSpPr>
-          <p:cNvPr id="20" name="TextBox 19"/>
-          <p:cNvSpPr txBox="1"/>
-          <p:nvPr/>
-        </p:nvSpPr>
-        <p:spPr>
-          <a:xfrm>
-            <a:off x="822959" y="4142231"/>
-            <a:ext cx="10552176" cy="1783080"/>
+          <p:cNvPr id="14" name="TextBox 13"/>
+          <p:cNvSpPr txBox="1"/>
+          <p:nvPr/>
+        </p:nvSpPr>
+        <p:spPr>
+          <a:xfrm>
+            <a:off x="822959" y="4279392"/>
+            <a:ext cx="10552176" cy="1645920"/>
           </a:xfrm>
           <a:prstGeom prst="rect">
             <a:avLst/>
@@ -7987,7 +7681,7 @@
                 </a:solidFill>
                 <a:latin typeface="Calibri"/>
               </a:rPr>
-              <a:t>Кто и что решает</a:t>
+              <a:t>Что делает агент</a:t>
             </a:r>
           </a:p>
           <a:p>
@@ -8003,7 +7697,7 @@
                 </a:solidFill>
                 <a:latin typeface="Calibri"/>
               </a:rPr>
-              <a:t>Предприниматель малого бизнеса без финансиста в штате. Перед сделкой с незнакомой компанией он решает: давать ли отсрочку, платить ли вперёд. Банк хочет, чтобы к проверке возвращались чаще, а для этого отчёту нужен вывод: на каких условиях работать и какие факты это подтверждают.</a:t>
+              <a:t>Читает отчёт за пользователя, находит главное и говорит, на каких условиях работать с компанией и какие факты за этим стоят. Если контрагентов несколько, сравнивает их и говорит, кого выбрать. Каждое утверждение со ссылкой на место в отчёте, поэтому вывод можно проверить.</a:t>
             </a:r>
           </a:p>
         </p:txBody>
@@ -8321,7 +8015,7 @@
                 </a:solidFill>
                 <a:latin typeface="Calibri"/>
               </a:rPr>
-              <a:t>Из отчёта банка по одной компании собрать короткий вывод с фактами и отвечать на вопросы о ней, не выдумывая ничего сверх отчёта.</a:t>
+              <a:t>Из отчёта банка о компании сделать короткий вывод с фактами, отвечать на вопросы о ней и сравнивать несколько компаний, не выдумывая ничего сверх отчёта.</a:t>
             </a:r>
           </a:p>
         </p:txBody>
@@ -8480,7 +8174,7 @@
                 </a:solidFill>
                 <a:latin typeface="Calibri"/>
               </a:rPr>
-              <a:t>Первый экран</a:t>
+              <a:t>Короткий вывод по компании</a:t>
             </a:r>
           </a:p>
           <a:p>
@@ -8496,7 +8190,7 @@
                 </a:solidFill>
                 <a:latin typeface="Calibri"/>
               </a:rPr>
-              <a:t>Метки банка как есть, дата отчёта, два-три решающих факта со ссылкой на поле и рекомендация: можно работать, стоит проверить, работать на условиях</a:t>
+              <a:t>Оценки банка как есть, дата отчёта, два-три решающих факта со ссылкой на место в отчёте и рекомендация: можно работать, стоит проверить, работать на условиях</a:t>
             </a:r>
           </a:p>
         </p:txBody>
@@ -8632,7 +8326,7 @@
                 </a:solidFill>
                 <a:latin typeface="Calibri"/>
               </a:rPr>
-              <a:t>Сколько судов, есть ли долги, что с отчётностью. Только по отчёту, с указанием поля. Сессия помнит, о какой компании речь</a:t>
+              <a:t>Сколько судов, есть ли долги, что с отчётностью. Только по отчёту, с указанием поля. Агент помнит, о какой компании идёт разговор</a:t>
             </a:r>
           </a:p>
         </p:txBody>
@@ -8888,7 +8582,7 @@
                 </a:solidFill>
                 <a:latin typeface="Calibri"/>
               </a:rPr>
-              <a:t>Несколько компаний</a:t>
+              <a:t>Сравнение нескольких компаний · в работе</a:t>
             </a:r>
           </a:p>
           <a:p>
@@ -8904,7 +8598,7 @@
                 </a:solidFill>
                 <a:latin typeface="Calibri"/>
               </a:rPr>
-              <a:t>В одной сессии можно спросить про нескольких и получить вывод, с кем лучше и с кем не стоит, без рейтингов</a:t>
+              <a:t>Пользователь загружает несколько отчётов и получает вывод, кого выбрать и с кем не стоит. Без рейтингов и баллов, как просил кейсодатель</a:t>
             </a:r>
           </a:p>
         </p:txBody>
@@ -8987,7 +8681,7 @@
                 </a:solidFill>
                 <a:latin typeface="Calibri"/>
               </a:rPr>
-              <a:t>Чего не делает: не пересчитывает и не объясняет метку банка, не ставит свой скор, не ищет в интернете и не решает за пользователя.</a:t>
+              <a:t>Чего не делает: не пересчитывает и не объясняет оценку банка, не ставит свой балл, не ищет в интернете и не решает за пользователя.</a:t>
             </a:r>
           </a:p>
         </p:txBody>
@@ -9289,7 +8983,7 @@
                 </a:solidFill>
                 <a:latin typeface="Calibri"/>
               </a:rPr>
-              <a:t>ЧТО ГОВОРИТ ОТЧЁТ СВЕРХУ</a:t>
+              <a:t>ЧТО ВИДНО В НАЧАЛЕ ОТЧЁТА</a:t>
             </a:r>
           </a:p>
         </p:txBody>
@@ -9328,7 +9022,7 @@
                 </a:solidFill>
                 <a:latin typeface="Calibri"/>
               </a:rPr>
-              <a:t>Светофор банка: зелёный</a:t>
+              <a:t>Оценка банка: низкий риск, зелёный</a:t>
             </a:r>
           </a:p>
           <a:p>
@@ -9344,7 +9038,7 @@
                 </a:solidFill>
                 <a:latin typeface="Calibri"/>
               </a:rPr>
-              <a:t>ЗСК: зелёный</a:t>
+              <a:t>Оценка Банка России (ЗСК): зелёный</a:t>
             </a:r>
           </a:p>
           <a:p>
@@ -9360,7 +9054,7 @@
                 </a:solidFill>
                 <a:latin typeface="Calibri"/>
               </a:rPr>
-              <a:t>Статус: действующее</a:t>
+              <a:t>Статус: действующая компания</a:t>
             </a:r>
           </a:p>
           <a:p>
@@ -9376,7 +9070,7 @@
                 </a:solidFill>
                 <a:latin typeface="Calibri"/>
               </a:rPr>
-              <a:t>Так выглядит карточка на первом экране. Большинство пользователей дальше не читает.</a:t>
+              <a:t>Так выглядит первая страница отчёта. Большинство пользователей дальше не читает.</a:t>
             </a:r>
           </a:p>
         </p:txBody>
@@ -9459,7 +9153,7 @@
                 </a:solidFill>
                 <a:latin typeface="Calibri"/>
               </a:rPr>
-              <a:t>ЧТО ЛЕЖИТ В ТОМ ЖЕ ОТЧЁТЕ НИЖЕ</a:t>
+              <a:t>ЧТО НАПИСАНО В ТОМ ЖЕ ОТЧЁТЕ ДАЛЬШЕ</a:t>
             </a:r>
           </a:p>
         </p:txBody>
@@ -9645,7 +9339,7 @@
                 </a:solidFill>
                 <a:latin typeface="Calibri"/>
               </a:rPr>
-              <a:t>Таких компаний 6 из 200 в тестовой выгрузке</a:t>
+              <a:t>Таких компаний 6 из 200 отчётов в тестовой выгрузке</a:t>
             </a:r>
           </a:p>
           <a:p>
@@ -9661,7 +9355,7 @@
                 </a:solidFill>
                 <a:latin typeface="Calibri"/>
               </a:rPr>
-              <a:t>Агент показывает эти факты первыми и рекомендует работать только на условиях: предоплата и подтверждающие документы. Метку банка при этом не оспаривает, а приводит как есть.</a:t>
+              <a:t>Агент выводит эти факты первыми и даёт вывод: работать только на условиях предоплаты и с подтверждающими документами. Оценку банка при этом не оспаривает, а приводит как есть.</a:t>
             </a:r>
           </a:p>
         </p:txBody>
@@ -10002,7 +9696,7 @@
                 </a:solidFill>
                 <a:latin typeface="Calibri"/>
               </a:rPr>
-              <a:t>200 карточек</a:t>
+              <a:t>200 отчётов</a:t>
             </a:r>
           </a:p>
         </p:txBody>
@@ -10041,7 +9735,7 @@
                 </a:solidFill>
                 <a:latin typeface="Calibri"/>
               </a:rPr>
-              <a:t>два формата выгрузки приводим к одной схеме; секции «нет» и «пусто» различаем</a:t>
+              <a:t>тестовая выгрузка банка в двух форматах; приводим к одной структуре и проверяем каждое поле</a:t>
             </a:r>
           </a:p>
         </p:txBody>
@@ -10199,7 +9893,7 @@
                 </a:solidFill>
                 <a:latin typeface="Calibri"/>
               </a:rPr>
-              <a:t>без модели</a:t>
+              <a:t>без нейросети</a:t>
             </a:r>
           </a:p>
         </p:txBody>
@@ -10238,7 +9932,7 @@
                 </a:solidFill>
                 <a:latin typeface="Calibri"/>
               </a:rPr>
-              <a:t>около 30 правил по статусам, долгам, судам и финансам; рекомендация считается кодом</a:t>
+              <a:t>около 30 правил находят риски: банкротство, долги, суды, убытки. Вывод «можно / проверить / на условиях» считает код</a:t>
             </a:r>
           </a:p>
         </p:txBody>
@@ -10435,7 +10129,7 @@
                 </a:solidFill>
                 <a:latin typeface="Calibri"/>
               </a:rPr>
-              <a:t>агент читает отчёт только через них; каждый ответ с адресом поля и датой</a:t>
+              <a:t>агент читает отчёт только через них; каждый ответ содержит адрес поля в отчёте и дату отчёта</a:t>
             </a:r>
           </a:p>
         </p:txBody>
@@ -10593,7 +10287,7 @@
                 </a:solidFill>
                 <a:latin typeface="Calibri"/>
               </a:rPr>
-              <a:t>модель + проверка</a:t>
+              <a:t>нейросеть + проверка</a:t>
             </a:r>
           </a:p>
         </p:txBody>
@@ -10632,7 +10326,7 @@
                 </a:solidFill>
                 <a:latin typeface="Calibri"/>
               </a:rPr>
-              <a:t>модель выбирает инструменты и пишет текст; отдельный шаг сверяет каждую ссылку с отчётом</a:t>
+              <a:t>языковая модель решает, что запросить, и пишет ответ; отдельный шаг сверяет каждую ссылку с отчётом</a:t>
             </a:r>
           </a:p>
         </p:txBody>
@@ -10829,7 +10523,7 @@
                 </a:solidFill>
                 <a:latin typeface="Calibri"/>
               </a:rPr>
-              <a:t>ответ приходит потоком, сессия помнит контекст; есть страница чата</a:t>
+              <a:t>ответ приходит по мере готовности; агент помнит контекст разговора</a:t>
             </a:r>
           </a:p>
         </p:txBody>
@@ -10928,7 +10622,7 @@
                 </a:solidFill>
                 <a:latin typeface="Calibri"/>
               </a:rPr>
-              <a:t>Всё, что можно посчитать, считает код: сигналы, рекомендацию, карточку. Модель только формулирует. Ссылка на поле, которого в отчёте нет, не проходит проверку, и ответ переписывается.</a:t>
+              <a:t>Всё, что можно посчитать, считает код: риски, вывод, список фактов. Нейросеть только формулирует текст. Если она сослалась на поле, которого в отчёте нет, проверка это ловит, и ответ переписывается.</a:t>
             </a:r>
           </a:p>
         </p:txBody>
@@ -11160,7 +10854,7 @@
         </p:nvSpPr>
         <p:spPr>
           <a:xfrm>
-            <a:off x="640080" y="1600200"/>
+            <a:off x="640080" y="1554480"/>
             <a:ext cx="310896" cy="310896"/>
           </a:xfrm>
           <a:prstGeom prst="ellipse">
@@ -11202,7 +10896,7 @@
         </p:nvSpPr>
         <p:spPr>
           <a:xfrm>
-            <a:off x="640080" y="1609344"/>
+            <a:off x="640080" y="1563624"/>
             <a:ext cx="310896" cy="274320"/>
           </a:xfrm>
           <a:prstGeom prst="rect">
@@ -11241,7 +10935,7 @@
         </p:nvSpPr>
         <p:spPr>
           <a:xfrm>
-            <a:off x="1097280" y="1527048"/>
+            <a:off x="1097280" y="1481328"/>
             <a:ext cx="4846320" cy="868680"/>
           </a:xfrm>
           <a:prstGeom prst="rect">
@@ -11267,7 +10961,7 @@
                 </a:solidFill>
                 <a:latin typeface="Calibri"/>
               </a:rPr>
-              <a:t>Сквозной прототип</a:t>
+              <a:t>Сквозной сценарий работает</a:t>
             </a:r>
           </a:p>
           <a:p>
@@ -11283,7 +10977,7 @@
                 </a:solidFill>
                 <a:latin typeface="Calibri"/>
               </a:rPr>
-              <a:t>по ИНН или названию агент читает отчёт, считает сигналы и собирает карточку с проверенными ссылками на поля</a:t>
+              <a:t>по ИНН или названию агент читает отчёт, находит риски и даёт вывод; каждая ссылка на отчёт проверена кодом</a:t>
             </a:r>
           </a:p>
         </p:txBody>
@@ -11296,7 +10990,7 @@
         </p:nvSpPr>
         <p:spPr>
           <a:xfrm>
-            <a:off x="6309360" y="1600200"/>
+            <a:off x="6309360" y="1554480"/>
             <a:ext cx="310896" cy="310896"/>
           </a:xfrm>
           <a:prstGeom prst="ellipse">
@@ -11338,7 +11032,7 @@
         </p:nvSpPr>
         <p:spPr>
           <a:xfrm>
-            <a:off x="6309360" y="1609344"/>
+            <a:off x="6309360" y="1563624"/>
             <a:ext cx="310896" cy="274320"/>
           </a:xfrm>
           <a:prstGeom prst="rect">
@@ -11377,7 +11071,7 @@
         </p:nvSpPr>
         <p:spPr>
           <a:xfrm>
-            <a:off x="6766560" y="1527048"/>
+            <a:off x="6766560" y="1481328"/>
             <a:ext cx="4846320" cy="868680"/>
           </a:xfrm>
           <a:prstGeom prst="rect">
@@ -11403,7 +11097,7 @@
                 </a:solidFill>
                 <a:latin typeface="Calibri"/>
               </a:rPr>
-              <a:t>Все 200 карточек читаются</a:t>
+              <a:t>Все 200 отчётов из выгрузки читаются без ошибок</a:t>
             </a:r>
           </a:p>
           <a:p>
@@ -11419,7 +11113,7 @@
                 </a:solidFill>
                 <a:latin typeface="Calibri"/>
               </a:rPr>
-              <a:t>63 519 адресов полей прошли проверку туда и обратно; ловятся банкрот с зелёной меткой и исключение из реестра</a:t>
+              <a:t>каждое поле отчёта имеет адрес, и адрес в ответе агента ведёт на реальное место в отчёте</a:t>
             </a:r>
           </a:p>
         </p:txBody>
@@ -11432,7 +11126,7 @@
         </p:nvSpPr>
         <p:spPr>
           <a:xfrm>
-            <a:off x="640080" y="2743200"/>
+            <a:off x="640080" y="2606039"/>
             <a:ext cx="310896" cy="310896"/>
           </a:xfrm>
           <a:prstGeom prst="ellipse">
@@ -11474,7 +11168,7 @@
         </p:nvSpPr>
         <p:spPr>
           <a:xfrm>
-            <a:off x="640080" y="2752344"/>
+            <a:off x="640080" y="2615184"/>
             <a:ext cx="310896" cy="274320"/>
           </a:xfrm>
           <a:prstGeom prst="rect">
@@ -11513,7 +11207,7 @@
         </p:nvSpPr>
         <p:spPr>
           <a:xfrm>
-            <a:off x="1097280" y="2670048"/>
+            <a:off x="1097280" y="2532888"/>
             <a:ext cx="4846320" cy="868680"/>
           </a:xfrm>
           <a:prstGeom prst="rect">
@@ -11539,7 +11233,7 @@
                 </a:solidFill>
                 <a:latin typeface="Calibri"/>
               </a:rPr>
-              <a:t>Рекомендация по всем компаниям</a:t>
+              <a:t>Вывод по всем 200 компаниям считается автоматически</a:t>
             </a:r>
           </a:p>
           <a:p>
@@ -11555,7 +11249,7 @@
                 </a:solidFill>
                 <a:latin typeface="Calibri"/>
               </a:rPr>
-              <a:t>91 можно работать, 77 стоит проверить, 32 только на условиях; пороги согласованы с кейсодателем</a:t>
+              <a:t>91 «можно работать», 77 «стоит проверить», 32 «только на условиях»; пороги согласованы с кейсодателем</a:t>
             </a:r>
           </a:p>
         </p:txBody>
@@ -11568,7 +11262,7 @@
         </p:nvSpPr>
         <p:spPr>
           <a:xfrm>
-            <a:off x="6309360" y="2743200"/>
+            <a:off x="6309360" y="2606039"/>
             <a:ext cx="310896" cy="310896"/>
           </a:xfrm>
           <a:prstGeom prst="ellipse">
@@ -11610,7 +11304,7 @@
         </p:nvSpPr>
         <p:spPr>
           <a:xfrm>
-            <a:off x="6309360" y="2752344"/>
+            <a:off x="6309360" y="2615184"/>
             <a:ext cx="310896" cy="274320"/>
           </a:xfrm>
           <a:prstGeom prst="rect">
@@ -11649,7 +11343,7 @@
         </p:nvSpPr>
         <p:spPr>
           <a:xfrm>
-            <a:off x="6766560" y="2670048"/>
+            <a:off x="6766560" y="2532888"/>
             <a:ext cx="4846320" cy="868680"/>
           </a:xfrm>
           <a:prstGeom prst="rect">
@@ -11675,7 +11369,7 @@
                 </a:solidFill>
                 <a:latin typeface="Calibri"/>
               </a:rPr>
-              <a:t>Интерфейс для агентов банка</a:t>
+              <a:t>Скрытые банкротства находятся</a:t>
             </a:r>
           </a:p>
           <a:p>
@@ -11691,7 +11385,7 @@
                 </a:solidFill>
                 <a:latin typeface="Calibri"/>
               </a:rPr>
-              <a:t>сервер инструментов подключается к внешним клиентам, например Claude Desktop</a:t>
+              <a:t>все 6 компаний с зелёной оценкой и банкротством или исключением из реестра получили вывод «работать только на условиях»</a:t>
             </a:r>
           </a:p>
         </p:txBody>
@@ -11704,7 +11398,7 @@
         </p:nvSpPr>
         <p:spPr>
           <a:xfrm>
-            <a:off x="640080" y="3886200"/>
+            <a:off x="640080" y="3657599"/>
             <a:ext cx="310896" cy="310896"/>
           </a:xfrm>
           <a:prstGeom prst="ellipse">
@@ -11746,7 +11440,7 @@
         </p:nvSpPr>
         <p:spPr>
           <a:xfrm>
-            <a:off x="640080" y="3895344"/>
+            <a:off x="640080" y="3666744"/>
             <a:ext cx="310896" cy="274320"/>
           </a:xfrm>
           <a:prstGeom prst="rect">
@@ -11785,7 +11479,7 @@
         </p:nvSpPr>
         <p:spPr>
           <a:xfrm>
-            <a:off x="1097280" y="3813048"/>
+            <a:off x="1097280" y="3584448"/>
             <a:ext cx="4846320" cy="868680"/>
           </a:xfrm>
           <a:prstGeom prst="rect">
@@ -11811,7 +11505,7 @@
                 </a:solidFill>
                 <a:latin typeface="Calibri"/>
               </a:rPr>
-              <a:t>Потоковый API и страница чата</a:t>
+              <a:t>Данные агента доступны другим системам банка</a:t>
             </a:r>
           </a:p>
           <a:p>
@@ -11827,7 +11521,7 @@
                 </a:solidFill>
                 <a:latin typeface="Calibri"/>
               </a:rPr>
-              <a:t>ответ приходит по мере готовности; собирается в Docker</a:t>
+              <a:t>банк планирует отдавать отчёты ИИ-агентам через стандарт MCP; наш сервер уже работает по нему, например, из Claude Desktop</a:t>
             </a:r>
           </a:p>
         </p:txBody>
@@ -11840,7 +11534,7 @@
         </p:nvSpPr>
         <p:spPr>
           <a:xfrm>
-            <a:off x="6309360" y="3886200"/>
+            <a:off x="6309360" y="3657599"/>
             <a:ext cx="310896" cy="310896"/>
           </a:xfrm>
           <a:prstGeom prst="ellipse">
@@ -11882,7 +11576,7 @@
         </p:nvSpPr>
         <p:spPr>
           <a:xfrm>
-            <a:off x="6309360" y="3895344"/>
+            <a:off x="6309360" y="3666744"/>
             <a:ext cx="310896" cy="274320"/>
           </a:xfrm>
           <a:prstGeom prst="rect">
@@ -11921,7 +11615,7 @@
         </p:nvSpPr>
         <p:spPr>
           <a:xfrm>
-            <a:off x="6766560" y="3813048"/>
+            <a:off x="6766560" y="3584448"/>
             <a:ext cx="4846320" cy="868680"/>
           </a:xfrm>
           <a:prstGeom prst="rect">
@@ -11947,7 +11641,7 @@
                 </a:solidFill>
                 <a:latin typeface="Calibri"/>
               </a:rPr>
-              <a:t>175 автотестов без сети и модели</a:t>
+              <a:t>Ответ приходит по мере готовности</a:t>
             </a:r>
           </a:p>
           <a:p>
@@ -11963,7 +11657,7 @@
                 </a:solidFill>
                 <a:latin typeface="Calibri"/>
               </a:rPr>
-              <a:t>модель меняется одной строкой настроек, проверено на трёх разных</a:t>
+              <a:t>есть страница чата и API; всё собирается в Docker одной командой</a:t>
             </a:r>
           </a:p>
         </p:txBody>
@@ -11976,7 +11670,7 @@
         </p:nvSpPr>
         <p:spPr>
           <a:xfrm>
-            <a:off x="640080" y="5029200"/>
+            <a:off x="640080" y="4709159"/>
             <a:ext cx="310896" cy="310896"/>
           </a:xfrm>
           <a:prstGeom prst="ellipse">
@@ -12018,7 +11712,7 @@
         </p:nvSpPr>
         <p:spPr>
           <a:xfrm>
-            <a:off x="640080" y="5038344"/>
+            <a:off x="640080" y="4718303"/>
             <a:ext cx="310896" cy="274320"/>
           </a:xfrm>
           <a:prstGeom prst="rect">
@@ -12057,7 +11751,7 @@
         </p:nvSpPr>
         <p:spPr>
           <a:xfrm>
-            <a:off x="1097280" y="4956048"/>
+            <a:off x="1097280" y="4636007"/>
             <a:ext cx="4846320" cy="868680"/>
           </a:xfrm>
           <a:prstGeom prst="rect">
@@ -12083,7 +11777,7 @@
                 </a:solidFill>
                 <a:latin typeface="Calibri"/>
               </a:rPr>
-              <a:t>Эталон для проверки качества</a:t>
+              <a:t>175 автоматических тестов</a:t>
             </a:r>
           </a:p>
           <a:p>
@@ -12099,7 +11793,7 @@
                 </a:solidFill>
                 <a:latin typeface="Calibri"/>
               </a:rPr>
-              <a:t>50 вопросов на 12 компаниях, проверки кодом и модель-судья; прогоны на двух моделях идут</a:t>
+              <a:t>проверяют данные, правила и инструменты без обращения к нейросети, поэтому идут секунды и запускаются на каждое изменение</a:t>
             </a:r>
           </a:p>
         </p:txBody>
@@ -12112,7 +11806,7 @@
         </p:nvSpPr>
         <p:spPr>
           <a:xfrm>
-            <a:off x="6309360" y="5029200"/>
+            <a:off x="6309360" y="4709159"/>
             <a:ext cx="310896" cy="310896"/>
           </a:xfrm>
           <a:prstGeom prst="ellipse">
@@ -12154,7 +11848,7 @@
         </p:nvSpPr>
         <p:spPr>
           <a:xfrm>
-            <a:off x="6309360" y="5038344"/>
+            <a:off x="6309360" y="4718303"/>
             <a:ext cx="310896" cy="274320"/>
           </a:xfrm>
           <a:prstGeom prst="rect">
@@ -12193,7 +11887,7 @@
         </p:nvSpPr>
         <p:spPr>
           <a:xfrm>
-            <a:off x="6766560" y="4956048"/>
+            <a:off x="6766560" y="4636007"/>
             <a:ext cx="4846320" cy="868680"/>
           </a:xfrm>
           <a:prstGeom prst="rect">
@@ -12219,7 +11913,7 @@
                 </a:solidFill>
                 <a:latin typeface="Calibri"/>
               </a:rPr>
-              <a:t>Разбор данных и правила</a:t>
+              <a:t>Нейросеть заменяется одной настройкой</a:t>
             </a:r>
           </a:p>
           <a:p>
@@ -12235,7 +11929,143 @@
                 </a:solidFill>
                 <a:latin typeface="Calibri"/>
               </a:rPr>
-              <a:t>37 замечаний по правилам найдены и закрыты; тяжести фактов согласованы с кейсодателем</a:t>
+              <a:t>проверили на трёх разных моделях; это нужно, чтобы агент работал на дешёвой модели, которую выберет банк</a:t>
+            </a:r>
+          </a:p>
+        </p:txBody>
+      </p:sp>
+      <p:sp>
+        <p:nvSpPr>
+          <p:cNvPr id="31" name="Oval 30"/>
+          <p:cNvSpPr/>
+          <p:nvPr/>
+        </p:nvSpPr>
+        <p:spPr>
+          <a:xfrm>
+            <a:off x="640080" y="5760720"/>
+            <a:ext cx="310896" cy="310896"/>
+          </a:xfrm>
+          <a:prstGeom prst="ellipse">
+            <a:avLst/>
+          </a:prstGeom>
+          <a:solidFill>
+            <a:srgbClr val="C77700"/>
+          </a:solidFill>
+          <a:ln>
+            <a:noFill/>
+          </a:ln>
+          <a:effectLst/>
+        </p:spPr>
+        <p:style>
+          <a:lnRef idx="1">
+            <a:schemeClr val="accent1"/>
+          </a:lnRef>
+          <a:fillRef idx="3">
+            <a:schemeClr val="accent1"/>
+          </a:fillRef>
+          <a:effectRef idx="2">
+            <a:schemeClr val="accent1"/>
+          </a:effectRef>
+          <a:fontRef idx="minor">
+            <a:schemeClr val="lt1"/>
+          </a:fontRef>
+        </p:style>
+        <p:txBody>
+          <a:bodyPr rtlCol="0" anchor="ctr"/>
+          <a:lstStyle/>
+          <a:p/>
+        </p:txBody>
+      </p:sp>
+      <p:sp>
+        <p:nvSpPr>
+          <p:cNvPr id="32" name="TextBox 31"/>
+          <p:cNvSpPr txBox="1"/>
+          <p:nvPr/>
+        </p:nvSpPr>
+        <p:spPr>
+          <a:xfrm>
+            <a:off x="640080" y="5760720"/>
+            <a:ext cx="310896" cy="274320"/>
+          </a:xfrm>
+          <a:prstGeom prst="rect">
+            <a:avLst/>
+          </a:prstGeom>
+          <a:noFill/>
+        </p:spPr>
+        <p:txBody>
+          <a:bodyPr wrap="square" lIns="0" rIns="0" tIns="18288" bIns="18288" anchor="t">
+            <a:spAutoFit/>
+          </a:bodyPr>
+          <a:lstStyle/>
+          <a:p>
+            <a:pPr algn="ctr">
+              <a:spcAft>
+                <a:spcPts val="400"/>
+              </a:spcAft>
+            </a:pPr>
+            <a:r>
+              <a:rPr sz="1200" b="1">
+                <a:solidFill>
+                  <a:srgbClr val="FFFFFF"/>
+                </a:solidFill>
+                <a:latin typeface="Calibri"/>
+              </a:rPr>
+              <a:t>…</a:t>
+            </a:r>
+          </a:p>
+        </p:txBody>
+      </p:sp>
+      <p:sp>
+        <p:nvSpPr>
+          <p:cNvPr id="33" name="TextBox 32"/>
+          <p:cNvSpPr txBox="1"/>
+          <p:nvPr/>
+        </p:nvSpPr>
+        <p:spPr>
+          <a:xfrm>
+            <a:off x="1097280" y="5687568"/>
+            <a:ext cx="10515600" cy="868680"/>
+          </a:xfrm>
+          <a:prstGeom prst="rect">
+            <a:avLst/>
+          </a:prstGeom>
+          <a:noFill/>
+        </p:spPr>
+        <p:txBody>
+          <a:bodyPr wrap="square" lIns="0" rIns="0" tIns="18288" bIns="18288" anchor="t">
+            <a:spAutoFit/>
+          </a:bodyPr>
+          <a:lstStyle/>
+          <a:p>
+            <a:pPr algn="l">
+              <a:spcAft>
+                <a:spcPts val="100"/>
+              </a:spcAft>
+            </a:pPr>
+            <a:r>
+              <a:rPr sz="1300" b="1">
+                <a:solidFill>
+                  <a:srgbClr val="1B1F3B"/>
+                </a:solidFill>
+                <a:latin typeface="Calibri"/>
+              </a:rPr>
+              <a:t>Сравнение нескольких контрагентов · в работе</a:t>
+            </a:r>
+          </a:p>
+          <a:p>
+            <a:pPr algn="l">
+              <a:spcAft>
+                <a:spcPts val="400"/>
+              </a:spcAft>
+            </a:pPr>
+            <a:r>
+              <a:rPr sz="1150" b="0">
+                <a:solidFill>
+                  <a:srgbClr val="5A6470"/>
+                </a:solidFill>
+                <a:latin typeface="Calibri"/>
+              </a:rPr>
+              <a:t>инструмент сравнения готов, сценарий «загрузил несколько отчётов и получил, кого выбрать» дописываем в интерфейсе и промпте</a:t>
             </a:r>
           </a:p>
         </p:txBody>
@@ -13312,7 +13142,7 @@
                 </a:solidFill>
                 <a:latin typeface="Calibri"/>
               </a:rPr>
-              <a:t>Пользователь вводит ИНН и спрашивает. Так работает наш стенд, и так проще показать.</a:t>
+              <a:t>Пользователь вводит ИНН и спрашивает. Так работает наш прототип сейчас, и так проще показать.</a:t>
             </a:r>
           </a:p>
           <a:p>
@@ -13738,7 +13568,7 @@
                 </a:solidFill>
                 <a:latin typeface="Calibri"/>
               </a:rPr>
-              <a:t>Как проверяем качество</a:t>
+              <a:t>Как тестируем агента</a:t>
             </a:r>
           </a:p>
         </p:txBody>
@@ -13791,11 +13621,11 @@
         <p:spPr>
           <a:xfrm>
             <a:off x="548640" y="1417320"/>
-            <a:ext cx="5394960" cy="1554480"/>
+            <a:ext cx="5394960" cy="1600200"/>
           </a:xfrm>
           <a:prstGeom prst="roundRect">
             <a:avLst>
-              <a:gd name="adj" fmla="val 7058"/>
+              <a:gd name="adj" fmla="val 6857"/>
             </a:avLst>
           </a:prstGeom>
           <a:solidFill>
@@ -13834,8 +13664,8 @@
         </p:nvSpPr>
         <p:spPr>
           <a:xfrm>
-            <a:off x="777240" y="1554480"/>
-            <a:ext cx="4937760" cy="1371600"/>
+            <a:off x="777240" y="1527048"/>
+            <a:ext cx="4937760" cy="1463040"/>
           </a:xfrm>
           <a:prstGeom prst="rect">
             <a:avLst/>
@@ -13854,19 +13684,19 @@
               </a:spcAft>
             </a:pPr>
             <a:r>
-              <a:rPr sz="1500" b="1">
+              <a:rPr sz="1400" b="1">
                 <a:solidFill>
                   <a:srgbClr val="1B1F3B"/>
                 </a:solidFill>
                 <a:latin typeface="Calibri"/>
               </a:rPr>
-              <a:t>Эталон</a:t>
+              <a:t>Эталон вопросов</a:t>
             </a:r>
           </a:p>
           <a:p>
             <a:pPr algn="l">
               <a:spcAft>
-                <a:spcPts val="600"/>
+                <a:spcPts val="400"/>
               </a:spcAft>
             </a:pPr>
             <a:r>
@@ -13876,7 +13706,7 @@
                 </a:solidFill>
                 <a:latin typeface="Calibri"/>
               </a:rPr>
-              <a:t>50 вопросов на 12 компаниях</a:t>
+              <a:t>50 вопросов к 12 компаниям с известными правильными ответами</a:t>
             </a:r>
           </a:p>
           <a:p>
@@ -13886,13 +13716,13 @@
               </a:spcAft>
             </a:pPr>
             <a:r>
-              <a:rPr sz="1150" b="0">
+              <a:rPr sz="1100" b="0">
                 <a:solidFill>
                   <a:srgbClr val="1A1A1A"/>
                 </a:solidFill>
                 <a:latin typeface="Calibri"/>
               </a:rPr>
-              <a:t>четыре типа: ответ есть в отчёте, ответа нет, нужен вывод, карточка целиком. Собран через наши же инструменты и перепроверен</a:t>
+              <a:t>четыре вида вопросов: ответ есть в отчёте · ответа нет, и агент должен отказаться · нужен вывод из нескольких фактов · полная проверка компании</a:t>
             </a:r>
           </a:p>
         </p:txBody>
@@ -13906,11 +13736,11 @@
         <p:spPr>
           <a:xfrm>
             <a:off x="6263640" y="1417320"/>
-            <a:ext cx="5394960" cy="1554480"/>
+            <a:ext cx="5394960" cy="1600200"/>
           </a:xfrm>
           <a:prstGeom prst="roundRect">
             <a:avLst>
-              <a:gd name="adj" fmla="val 7058"/>
+              <a:gd name="adj" fmla="val 6857"/>
             </a:avLst>
           </a:prstGeom>
           <a:solidFill>
@@ -13949,8 +13779,8 @@
         </p:nvSpPr>
         <p:spPr>
           <a:xfrm>
-            <a:off x="6492240" y="1554480"/>
-            <a:ext cx="4937760" cy="1371600"/>
+            <a:off x="6492240" y="1527048"/>
+            <a:ext cx="4937760" cy="1463040"/>
           </a:xfrm>
           <a:prstGeom prst="rect">
             <a:avLst/>
@@ -13969,19 +13799,19 @@
               </a:spcAft>
             </a:pPr>
             <a:r>
-              <a:rPr sz="1500" b="1">
+              <a:rPr sz="1400" b="1">
                 <a:solidFill>
                   <a:srgbClr val="1B1F3B"/>
                 </a:solidFill>
                 <a:latin typeface="Calibri"/>
               </a:rPr>
-              <a:t>Проверки кодом</a:t>
+              <a:t>Автоматические проверки</a:t>
             </a:r>
           </a:p>
           <a:p>
             <a:pPr algn="l">
               <a:spcAft>
-                <a:spcPts val="600"/>
+                <a:spcPts val="400"/>
               </a:spcAft>
             </a:pPr>
             <a:r>
@@ -13991,7 +13821,7 @@
                 </a:solidFill>
                 <a:latin typeface="Calibri"/>
               </a:rPr>
-              <a:t>без модели</a:t>
+              <a:t>код сверяет ответ агента с отчётом</a:t>
             </a:r>
           </a:p>
           <a:p>
@@ -14001,13 +13831,13 @@
               </a:spcAft>
             </a:pPr>
             <a:r>
-              <a:rPr sz="1150" b="0">
+              <a:rPr sz="1100" b="0">
                 <a:solidFill>
                   <a:srgbClr val="1A1A1A"/>
                 </a:solidFill>
                 <a:latin typeface="Calibri"/>
               </a:rPr>
-              <a:t>каждая ссылка ведёт на поле, число сходится; дата отчёта есть; без данных агент отказался; ярлыков на компанию нет</a:t>
+              <a:t>каждая ссылка ведёт на реальное поле, и число в ответе сходится с ним; дата отчёта названа; если данных нет, агент отказался, а не придумал</a:t>
             </a:r>
           </a:p>
         </p:txBody>
@@ -14021,11 +13851,11 @@
         <p:spPr>
           <a:xfrm>
             <a:off x="548640" y="3108960"/>
-            <a:ext cx="5394960" cy="1554480"/>
+            <a:ext cx="5394960" cy="1600200"/>
           </a:xfrm>
           <a:prstGeom prst="roundRect">
             <a:avLst>
-              <a:gd name="adj" fmla="val 7058"/>
+              <a:gd name="adj" fmla="val 6857"/>
             </a:avLst>
           </a:prstGeom>
           <a:solidFill>
@@ -14064,8 +13894,8 @@
         </p:nvSpPr>
         <p:spPr>
           <a:xfrm>
-            <a:off x="777240" y="3246120"/>
-            <a:ext cx="4937760" cy="1371600"/>
+            <a:off x="777240" y="3218688"/>
+            <a:ext cx="4937760" cy="1463040"/>
           </a:xfrm>
           <a:prstGeom prst="rect">
             <a:avLst/>
@@ -14084,19 +13914,19 @@
               </a:spcAft>
             </a:pPr>
             <a:r>
-              <a:rPr sz="1500" b="1">
+              <a:rPr sz="1400" b="1">
                 <a:solidFill>
                   <a:srgbClr val="1B1F3B"/>
                 </a:solidFill>
                 <a:latin typeface="Calibri"/>
               </a:rPr>
-              <a:t>Модель-судья</a:t>
+              <a:t>LLM-as-judge</a:t>
             </a:r>
           </a:p>
           <a:p>
             <a:pPr algn="l">
               <a:spcAft>
-                <a:spcPts val="600"/>
+                <a:spcPts val="400"/>
               </a:spcAft>
             </a:pPr>
             <a:r>
@@ -14106,7 +13936,7 @@
                 </a:solidFill>
                 <a:latin typeface="Calibri"/>
               </a:rPr>
-              <a:t>сильнее испытуемой</a:t>
+              <a:t>вторая нейросеть оценивает ответ по рубрике от 0 до 5</a:t>
             </a:r>
           </a:p>
           <a:p>
@@ -14116,13 +13946,13 @@
               </a:spcAft>
             </a:pPr>
             <a:r>
-              <a:rPr sz="1150" b="0">
+              <a:rPr sz="1100" b="0">
                 <a:solidFill>
                   <a:srgbClr val="1A1A1A"/>
                 </a:solidFill>
                 <a:latin typeface="Calibri"/>
               </a:rPr>
-              <a:t>видит выдачу инструментов, иначе не отличит выдумку от факта. Пропуск критичного факта, выдумка или ответ без данных дают ноль</a:t>
+              <a:t>она сильнее той, что внутри агента, и видит не только ответ, но и данные из отчёта, поэтому отличает факт от выдумки. Пропуск критичного факта или выдумка дают ноль</a:t>
             </a:r>
           </a:p>
         </p:txBody>
@@ -14136,11 +13966,11 @@
         <p:spPr>
           <a:xfrm>
             <a:off x="6263640" y="3108960"/>
-            <a:ext cx="5394960" cy="1554480"/>
+            <a:ext cx="5394960" cy="1600200"/>
           </a:xfrm>
           <a:prstGeom prst="roundRect">
             <a:avLst>
-              <a:gd name="adj" fmla="val 7058"/>
+              <a:gd name="adj" fmla="val 6857"/>
             </a:avLst>
           </a:prstGeom>
           <a:solidFill>
@@ -14179,8 +14009,8 @@
         </p:nvSpPr>
         <p:spPr>
           <a:xfrm>
-            <a:off x="6492240" y="3246120"/>
-            <a:ext cx="4937760" cy="1371600"/>
+            <a:off x="6492240" y="3218688"/>
+            <a:ext cx="4937760" cy="1463040"/>
           </a:xfrm>
           <a:prstGeom prst="rect">
             <a:avLst/>
@@ -14199,19 +14029,19 @@
               </a:spcAft>
             </a:pPr>
             <a:r>
-              <a:rPr sz="1500" b="1">
+              <a:rPr sz="1400" b="1">
                 <a:solidFill>
                   <a:srgbClr val="1B1F3B"/>
                 </a:solidFill>
                 <a:latin typeface="Calibri"/>
               </a:rPr>
-              <a:t>Две модели</a:t>
+              <a:t>Две модели под капотом агента</a:t>
             </a:r>
           </a:p>
           <a:p>
             <a:pPr algn="l">
               <a:spcAft>
-                <a:spcPts val="600"/>
+                <a:spcPts val="400"/>
               </a:spcAft>
             </a:pPr>
             <a:r>
@@ -14221,7 +14051,7 @@
                 </a:solidFill>
                 <a:latin typeface="Calibri"/>
               </a:rPr>
-              <a:t>на одном тексте</a:t>
+              <a:t>чтобы промпт был надёжным, а не подогнанным под одну модель</a:t>
             </a:r>
           </a:p>
           <a:p>
@@ -14231,13 +14061,13 @@
               </a:spcAft>
             </a:pPr>
             <a:r>
-              <a:rPr sz="1150" b="0">
+              <a:rPr sz="1100" b="0">
                 <a:solidFill>
                   <a:srgbClr val="1A1A1A"/>
                 </a:solidFill>
                 <a:latin typeface="Calibri"/>
               </a:rPr>
-              <a:t>целевая дешёвая и контрольная сильная. Валится одна: дело в модели. Валятся обе: дело в нас</a:t>
+              <a:t>один и тот же эталон гоняем на дешёвой модели, которую выберет банк, и на сильной контрольной. Ошибка только на дешёвой: слабость модели. На обеих: ошибка в наших правилах или промпте</a:t>
             </a:r>
           </a:p>
         </p:txBody>

--- a/deliverables/interim/PRESENTATION_INTERIM.pptx
+++ b/deliverables/interim/PRESENTATION_INTERIM.pptx
@@ -3705,7 +3705,7 @@
                 </a:solidFill>
                 <a:latin typeface="Calibri"/>
               </a:rPr>
-              <a:t>Первые результаты</a:t>
+              <a:t>Первые результаты: 50 вопросов, две модели</a:t>
             </a:r>
           </a:p>
         </p:txBody>
@@ -3751,19 +3751,17 @@
       </p:sp>
       <p:sp>
         <p:nvSpPr>
-          <p:cNvPr id="7" name="Rounded Rectangle 6"/>
+          <p:cNvPr id="7" name="Rectangle 6"/>
           <p:cNvSpPr/>
           <p:nvPr/>
         </p:nvSpPr>
         <p:spPr>
           <a:xfrm>
             <a:off x="548640" y="1417320"/>
-            <a:ext cx="3566160" cy="2103120"/>
-          </a:xfrm>
-          <a:prstGeom prst="roundRect">
-            <a:avLst>
-              <a:gd name="adj" fmla="val 5217"/>
-            </a:avLst>
+            <a:ext cx="11100816" cy="502920"/>
+          </a:xfrm>
+          <a:prstGeom prst="rect">
+            <a:avLst/>
           </a:prstGeom>
           <a:solidFill>
             <a:srgbClr val="1B1F3B"/>
@@ -3801,8 +3799,47 @@
         </p:nvSpPr>
         <p:spPr>
           <a:xfrm>
-            <a:off x="548640" y="1645920"/>
-            <a:ext cx="3566160" cy="914400"/>
+            <a:off x="640080" y="1490472"/>
+            <a:ext cx="2834639" cy="411480"/>
+          </a:xfrm>
+          <a:prstGeom prst="rect">
+            <a:avLst/>
+          </a:prstGeom>
+          <a:noFill/>
+        </p:spPr>
+        <p:txBody>
+          <a:bodyPr wrap="square" lIns="0" rIns="0" tIns="18288" bIns="18288" anchor="t">
+            <a:spAutoFit/>
+          </a:bodyPr>
+          <a:lstStyle/>
+          <a:p>
+            <a:pPr algn="l">
+              <a:spcAft>
+                <a:spcPts val="400"/>
+              </a:spcAft>
+            </a:pPr>
+            <a:r>
+              <a:rPr sz="1000" b="1">
+                <a:solidFill>
+                  <a:srgbClr val="FFFFFF"/>
+                </a:solidFill>
+                <a:latin typeface="Calibri"/>
+              </a:rPr>
+              <a:t/>
+            </a:r>
+          </a:p>
+        </p:txBody>
+      </p:sp>
+      <p:sp>
+        <p:nvSpPr>
+          <p:cNvPr id="9" name="TextBox 8"/>
+          <p:cNvSpPr txBox="1"/>
+          <p:nvPr/>
+        </p:nvSpPr>
+        <p:spPr>
+          <a:xfrm>
+            <a:off x="3657600" y="1490472"/>
+            <a:ext cx="1417320" cy="411480"/>
           </a:xfrm>
           <a:prstGeom prst="rect">
             <a:avLst/>
@@ -3821,27 +3858,27 @@
               </a:spcAft>
             </a:pPr>
             <a:r>
-              <a:rPr sz="4000" b="1">
+              <a:rPr sz="1000" b="1">
                 <a:solidFill>
                   <a:srgbClr val="FFFFFF"/>
                 </a:solidFill>
                 <a:latin typeface="Calibri"/>
               </a:rPr>
-              <a:t>18 из 18</a:t>
-            </a:r>
-          </a:p>
-        </p:txBody>
-      </p:sp>
-      <p:sp>
-        <p:nvSpPr>
-          <p:cNvPr id="9" name="TextBox 8"/>
-          <p:cNvSpPr txBox="1"/>
-          <p:nvPr/>
-        </p:nvSpPr>
-        <p:spPr>
-          <a:xfrm>
-            <a:off x="548640" y="2606040"/>
-            <a:ext cx="3566160" cy="320040"/>
+              <a:t>Подтверждаемых ответов</a:t>
+            </a:r>
+          </a:p>
+        </p:txBody>
+      </p:sp>
+      <p:sp>
+        <p:nvSpPr>
+          <p:cNvPr id="10" name="TextBox 9"/>
+          <p:cNvSpPr txBox="1"/>
+          <p:nvPr/>
+        </p:nvSpPr>
+        <p:spPr>
+          <a:xfrm>
+            <a:off x="5257800" y="1490472"/>
+            <a:ext cx="1234440" cy="411480"/>
           </a:xfrm>
           <a:prstGeom prst="rect">
             <a:avLst/>
@@ -3860,27 +3897,27 @@
               </a:spcAft>
             </a:pPr>
             <a:r>
-              <a:rPr sz="1300" b="1">
-                <a:solidFill>
-                  <a:srgbClr val="C9C6E8"/>
-                </a:solidFill>
-                <a:latin typeface="Calibri"/>
-              </a:rPr>
-              <a:t>ссылок на отчёт верны</a:t>
-            </a:r>
-          </a:p>
-        </p:txBody>
-      </p:sp>
-      <p:sp>
-        <p:nvSpPr>
-          <p:cNvPr id="10" name="TextBox 9"/>
-          <p:cNvSpPr txBox="1"/>
-          <p:nvPr/>
-        </p:nvSpPr>
-        <p:spPr>
-          <a:xfrm>
-            <a:off x="777240" y="2953512"/>
-            <a:ext cx="3108960" cy="457199"/>
+              <a:rPr sz="1000" b="1">
+                <a:solidFill>
+                  <a:srgbClr val="FFFFFF"/>
+                </a:solidFill>
+                <a:latin typeface="Calibri"/>
+              </a:rPr>
+              <a:t>Корректных отказов</a:t>
+            </a:r>
+          </a:p>
+        </p:txBody>
+      </p:sp>
+      <p:sp>
+        <p:nvSpPr>
+          <p:cNvPr id="11" name="TextBox 10"/>
+          <p:cNvSpPr txBox="1"/>
+          <p:nvPr/>
+        </p:nvSpPr>
+        <p:spPr>
+          <a:xfrm>
+            <a:off x="6675120" y="1490472"/>
+            <a:ext cx="960120" cy="411480"/>
           </a:xfrm>
           <a:prstGeom prst="rect">
             <a:avLst/>
@@ -3899,32 +3936,147 @@
               </a:spcAft>
             </a:pPr>
             <a:r>
-              <a:rPr sz="1100" b="0">
-                <a:solidFill>
-                  <a:srgbClr val="E4E4EC"/>
-                </a:solidFill>
-                <a:latin typeface="Calibri"/>
-              </a:rPr>
-              <a:t>в первом живом прогоне каждая ссылка агента на поле отчёта сошлась с данными</a:t>
-            </a:r>
-          </a:p>
-        </p:txBody>
-      </p:sp>
-      <p:sp>
-        <p:nvSpPr>
-          <p:cNvPr id="11" name="Rounded Rectangle 10"/>
+              <a:rPr sz="1000" b="1">
+                <a:solidFill>
+                  <a:srgbClr val="FFFFFF"/>
+                </a:solidFill>
+                <a:latin typeface="Calibri"/>
+              </a:rPr>
+              <a:t>Выдумок</a:t>
+            </a:r>
+          </a:p>
+        </p:txBody>
+      </p:sp>
+      <p:sp>
+        <p:nvSpPr>
+          <p:cNvPr id="12" name="TextBox 11"/>
+          <p:cNvSpPr txBox="1"/>
+          <p:nvPr/>
+        </p:nvSpPr>
+        <p:spPr>
+          <a:xfrm>
+            <a:off x="7818119" y="1490472"/>
+            <a:ext cx="1325880" cy="411480"/>
+          </a:xfrm>
+          <a:prstGeom prst="rect">
+            <a:avLst/>
+          </a:prstGeom>
+          <a:noFill/>
+        </p:spPr>
+        <p:txBody>
+          <a:bodyPr wrap="square" lIns="0" rIns="0" tIns="18288" bIns="18288" anchor="t">
+            <a:spAutoFit/>
+          </a:bodyPr>
+          <a:lstStyle/>
+          <a:p>
+            <a:pPr algn="ctr">
+              <a:spcAft>
+                <a:spcPts val="400"/>
+              </a:spcAft>
+            </a:pPr>
+            <a:r>
+              <a:rPr sz="1000" b="1">
+                <a:solidFill>
+                  <a:srgbClr val="FFFFFF"/>
+                </a:solidFill>
+                <a:latin typeface="Calibri"/>
+              </a:rPr>
+              <a:t>Пропущено критичных</a:t>
+            </a:r>
+          </a:p>
+        </p:txBody>
+      </p:sp>
+      <p:sp>
+        <p:nvSpPr>
+          <p:cNvPr id="13" name="TextBox 12"/>
+          <p:cNvSpPr txBox="1"/>
+          <p:nvPr/>
+        </p:nvSpPr>
+        <p:spPr>
+          <a:xfrm>
+            <a:off x="9326880" y="1490472"/>
+            <a:ext cx="914400" cy="411480"/>
+          </a:xfrm>
+          <a:prstGeom prst="rect">
+            <a:avLst/>
+          </a:prstGeom>
+          <a:noFill/>
+        </p:spPr>
+        <p:txBody>
+          <a:bodyPr wrap="square" lIns="0" rIns="0" tIns="18288" bIns="18288" anchor="t">
+            <a:spAutoFit/>
+          </a:bodyPr>
+          <a:lstStyle/>
+          <a:p>
+            <a:pPr algn="ctr">
+              <a:spcAft>
+                <a:spcPts val="400"/>
+              </a:spcAft>
+            </a:pPr>
+            <a:r>
+              <a:rPr sz="1000" b="1">
+                <a:solidFill>
+                  <a:srgbClr val="FFFFFF"/>
+                </a:solidFill>
+                <a:latin typeface="Calibri"/>
+              </a:rPr>
+              <a:t>Судья, 0–5</a:t>
+            </a:r>
+          </a:p>
+        </p:txBody>
+      </p:sp>
+      <p:sp>
+        <p:nvSpPr>
+          <p:cNvPr id="14" name="TextBox 13"/>
+          <p:cNvSpPr txBox="1"/>
+          <p:nvPr/>
+        </p:nvSpPr>
+        <p:spPr>
+          <a:xfrm>
+            <a:off x="10424159" y="1490472"/>
+            <a:ext cx="1133856" cy="411480"/>
+          </a:xfrm>
+          <a:prstGeom prst="rect">
+            <a:avLst/>
+          </a:prstGeom>
+          <a:noFill/>
+        </p:spPr>
+        <p:txBody>
+          <a:bodyPr wrap="square" lIns="0" rIns="0" tIns="18288" bIns="18288" anchor="t">
+            <a:spAutoFit/>
+          </a:bodyPr>
+          <a:lstStyle/>
+          <a:p>
+            <a:pPr algn="ctr">
+              <a:spcAft>
+                <a:spcPts val="400"/>
+              </a:spcAft>
+            </a:pPr>
+            <a:r>
+              <a:rPr sz="1000" b="1">
+                <a:solidFill>
+                  <a:srgbClr val="FFFFFF"/>
+                </a:solidFill>
+                <a:latin typeface="Calibri"/>
+              </a:rPr>
+              <a:t>Время ответа</a:t>
+            </a:r>
+          </a:p>
+        </p:txBody>
+      </p:sp>
+      <p:sp>
+        <p:nvSpPr>
+          <p:cNvPr id="15" name="Rectangle 14"/>
           <p:cNvSpPr/>
           <p:nvPr/>
         </p:nvSpPr>
         <p:spPr>
           <a:xfrm>
-            <a:off x="4315968" y="1417320"/>
-            <a:ext cx="3566160" cy="2103120"/>
-          </a:xfrm>
-          <a:prstGeom prst="roundRect">
-            <a:avLst>
-              <a:gd name="adj" fmla="val 5217"/>
-            </a:avLst>
+            <a:off x="548640" y="1920240"/>
+            <a:ext cx="11100816" cy="566928"/>
+          </a:xfrm>
+          <a:prstGeom prst="rect">
+            <a:avLst/>
           </a:prstGeom>
           <a:solidFill>
             <a:srgbClr val="F3F4F8"/>
@@ -3956,14 +4108,53 @@
       </p:sp>
       <p:sp>
         <p:nvSpPr>
-          <p:cNvPr id="12" name="TextBox 11"/>
-          <p:cNvSpPr txBox="1"/>
-          <p:nvPr/>
-        </p:nvSpPr>
-        <p:spPr>
-          <a:xfrm>
-            <a:off x="4315968" y="1645920"/>
-            <a:ext cx="3566160" cy="914400"/>
+          <p:cNvPr id="16" name="TextBox 15"/>
+          <p:cNvSpPr txBox="1"/>
+          <p:nvPr/>
+        </p:nvSpPr>
+        <p:spPr>
+          <a:xfrm>
+            <a:off x="640080" y="2029968"/>
+            <a:ext cx="2834639" cy="411480"/>
+          </a:xfrm>
+          <a:prstGeom prst="rect">
+            <a:avLst/>
+          </a:prstGeom>
+          <a:noFill/>
+        </p:spPr>
+        <p:txBody>
+          <a:bodyPr wrap="square" lIns="0" rIns="0" tIns="18288" bIns="18288" anchor="t">
+            <a:spAutoFit/>
+          </a:bodyPr>
+          <a:lstStyle/>
+          <a:p>
+            <a:pPr algn="l">
+              <a:spcAft>
+                <a:spcPts val="400"/>
+              </a:spcAft>
+            </a:pPr>
+            <a:r>
+              <a:rPr sz="1200" b="1">
+                <a:solidFill>
+                  <a:srgbClr val="1B1F3B"/>
+                </a:solidFill>
+                <a:latin typeface="Calibri"/>
+              </a:rPr>
+              <a:t>Контрольная: deepseek‑v4‑flash</a:t>
+            </a:r>
+          </a:p>
+        </p:txBody>
+      </p:sp>
+      <p:sp>
+        <p:nvSpPr>
+          <p:cNvPr id="17" name="TextBox 16"/>
+          <p:cNvSpPr txBox="1"/>
+          <p:nvPr/>
+        </p:nvSpPr>
+        <p:spPr>
+          <a:xfrm>
+            <a:off x="3657600" y="2029968"/>
+            <a:ext cx="1417320" cy="411480"/>
           </a:xfrm>
           <a:prstGeom prst="rect">
             <a:avLst/>
@@ -3982,27 +4173,303 @@
               </a:spcAft>
             </a:pPr>
             <a:r>
-              <a:rPr sz="4000" b="1">
+              <a:rPr sz="1300" b="0">
+                <a:solidFill>
+                  <a:srgbClr val="1A1A1A"/>
+                </a:solidFill>
+                <a:latin typeface="Calibri"/>
+              </a:rPr>
+              <a:t>74 %</a:t>
+            </a:r>
+          </a:p>
+        </p:txBody>
+      </p:sp>
+      <p:sp>
+        <p:nvSpPr>
+          <p:cNvPr id="18" name="TextBox 17"/>
+          <p:cNvSpPr txBox="1"/>
+          <p:nvPr/>
+        </p:nvSpPr>
+        <p:spPr>
+          <a:xfrm>
+            <a:off x="5257800" y="2029968"/>
+            <a:ext cx="1234440" cy="411480"/>
+          </a:xfrm>
+          <a:prstGeom prst="rect">
+            <a:avLst/>
+          </a:prstGeom>
+          <a:noFill/>
+        </p:spPr>
+        <p:txBody>
+          <a:bodyPr wrap="square" lIns="0" rIns="0" tIns="18288" bIns="18288" anchor="t">
+            <a:spAutoFit/>
+          </a:bodyPr>
+          <a:lstStyle/>
+          <a:p>
+            <a:pPr algn="ctr">
+              <a:spcAft>
+                <a:spcPts val="400"/>
+              </a:spcAft>
+            </a:pPr>
+            <a:r>
+              <a:rPr sz="1300" b="0">
+                <a:solidFill>
+                  <a:srgbClr val="1A1A1A"/>
+                </a:solidFill>
+                <a:latin typeface="Calibri"/>
+              </a:rPr>
+              <a:t>100 %</a:t>
+            </a:r>
+          </a:p>
+        </p:txBody>
+      </p:sp>
+      <p:sp>
+        <p:nvSpPr>
+          <p:cNvPr id="19" name="TextBox 18"/>
+          <p:cNvSpPr txBox="1"/>
+          <p:nvPr/>
+        </p:nvSpPr>
+        <p:spPr>
+          <a:xfrm>
+            <a:off x="6675120" y="2029968"/>
+            <a:ext cx="960120" cy="411480"/>
+          </a:xfrm>
+          <a:prstGeom prst="rect">
+            <a:avLst/>
+          </a:prstGeom>
+          <a:noFill/>
+        </p:spPr>
+        <p:txBody>
+          <a:bodyPr wrap="square" lIns="0" rIns="0" tIns="18288" bIns="18288" anchor="t">
+            <a:spAutoFit/>
+          </a:bodyPr>
+          <a:lstStyle/>
+          <a:p>
+            <a:pPr algn="ctr">
+              <a:spcAft>
+                <a:spcPts val="400"/>
+              </a:spcAft>
+            </a:pPr>
+            <a:r>
+              <a:rPr sz="1300" b="0">
+                <a:solidFill>
+                  <a:srgbClr val="1A1A1A"/>
+                </a:solidFill>
+                <a:latin typeface="Calibri"/>
+              </a:rPr>
+              <a:t>8 %</a:t>
+            </a:r>
+          </a:p>
+        </p:txBody>
+      </p:sp>
+      <p:sp>
+        <p:nvSpPr>
+          <p:cNvPr id="20" name="TextBox 19"/>
+          <p:cNvSpPr txBox="1"/>
+          <p:nvPr/>
+        </p:nvSpPr>
+        <p:spPr>
+          <a:xfrm>
+            <a:off x="7818119" y="2029968"/>
+            <a:ext cx="1325880" cy="411480"/>
+          </a:xfrm>
+          <a:prstGeom prst="rect">
+            <a:avLst/>
+          </a:prstGeom>
+          <a:noFill/>
+        </p:spPr>
+        <p:txBody>
+          <a:bodyPr wrap="square" lIns="0" rIns="0" tIns="18288" bIns="18288" anchor="t">
+            <a:spAutoFit/>
+          </a:bodyPr>
+          <a:lstStyle/>
+          <a:p>
+            <a:pPr algn="ctr">
+              <a:spcAft>
+                <a:spcPts val="400"/>
+              </a:spcAft>
+            </a:pPr>
+            <a:r>
+              <a:rPr sz="1300" b="0">
+                <a:solidFill>
+                  <a:srgbClr val="1A1A1A"/>
+                </a:solidFill>
+                <a:latin typeface="Calibri"/>
+              </a:rPr>
+              <a:t>0 %</a:t>
+            </a:r>
+          </a:p>
+        </p:txBody>
+      </p:sp>
+      <p:sp>
+        <p:nvSpPr>
+          <p:cNvPr id="21" name="TextBox 20"/>
+          <p:cNvSpPr txBox="1"/>
+          <p:nvPr/>
+        </p:nvSpPr>
+        <p:spPr>
+          <a:xfrm>
+            <a:off x="9326880" y="2029968"/>
+            <a:ext cx="914400" cy="411480"/>
+          </a:xfrm>
+          <a:prstGeom prst="rect">
+            <a:avLst/>
+          </a:prstGeom>
+          <a:noFill/>
+        </p:spPr>
+        <p:txBody>
+          <a:bodyPr wrap="square" lIns="0" rIns="0" tIns="18288" bIns="18288" anchor="t">
+            <a:spAutoFit/>
+          </a:bodyPr>
+          <a:lstStyle/>
+          <a:p>
+            <a:pPr algn="ctr">
+              <a:spcAft>
+                <a:spcPts val="400"/>
+              </a:spcAft>
+            </a:pPr>
+            <a:r>
+              <a:rPr sz="1300" b="0">
+                <a:solidFill>
+                  <a:srgbClr val="1A1A1A"/>
+                </a:solidFill>
+                <a:latin typeface="Calibri"/>
+              </a:rPr>
+              <a:t>4,4</a:t>
+            </a:r>
+          </a:p>
+        </p:txBody>
+      </p:sp>
+      <p:sp>
+        <p:nvSpPr>
+          <p:cNvPr id="22" name="TextBox 21"/>
+          <p:cNvSpPr txBox="1"/>
+          <p:nvPr/>
+        </p:nvSpPr>
+        <p:spPr>
+          <a:xfrm>
+            <a:off x="10424159" y="2029968"/>
+            <a:ext cx="1133856" cy="411480"/>
+          </a:xfrm>
+          <a:prstGeom prst="rect">
+            <a:avLst/>
+          </a:prstGeom>
+          <a:noFill/>
+        </p:spPr>
+        <p:txBody>
+          <a:bodyPr wrap="square" lIns="0" rIns="0" tIns="18288" bIns="18288" anchor="t">
+            <a:spAutoFit/>
+          </a:bodyPr>
+          <a:lstStyle/>
+          <a:p>
+            <a:pPr algn="ctr">
+              <a:spcAft>
+                <a:spcPts val="400"/>
+              </a:spcAft>
+            </a:pPr>
+            <a:r>
+              <a:rPr sz="1300" b="0">
+                <a:solidFill>
+                  <a:srgbClr val="1A1A1A"/>
+                </a:solidFill>
+                <a:latin typeface="Calibri"/>
+              </a:rPr>
+              <a:t>155 с</a:t>
+            </a:r>
+          </a:p>
+        </p:txBody>
+      </p:sp>
+      <p:sp>
+        <p:nvSpPr>
+          <p:cNvPr id="23" name="Rectangle 22"/>
+          <p:cNvSpPr/>
+          <p:nvPr/>
+        </p:nvSpPr>
+        <p:spPr>
+          <a:xfrm>
+            <a:off x="548640" y="2487168"/>
+            <a:ext cx="11100816" cy="566928"/>
+          </a:xfrm>
+          <a:prstGeom prst="rect">
+            <a:avLst/>
+          </a:prstGeom>
+          <a:solidFill>
+            <a:srgbClr val="FFFFFF"/>
+          </a:solidFill>
+          <a:ln>
+            <a:noFill/>
+          </a:ln>
+          <a:effectLst/>
+        </p:spPr>
+        <p:style>
+          <a:lnRef idx="1">
+            <a:schemeClr val="accent1"/>
+          </a:lnRef>
+          <a:fillRef idx="3">
+            <a:schemeClr val="accent1"/>
+          </a:fillRef>
+          <a:effectRef idx="2">
+            <a:schemeClr val="accent1"/>
+          </a:effectRef>
+          <a:fontRef idx="minor">
+            <a:schemeClr val="lt1"/>
+          </a:fontRef>
+        </p:style>
+        <p:txBody>
+          <a:bodyPr rtlCol="0" anchor="ctr"/>
+          <a:lstStyle/>
+          <a:p/>
+        </p:txBody>
+      </p:sp>
+      <p:sp>
+        <p:nvSpPr>
+          <p:cNvPr id="24" name="TextBox 23"/>
+          <p:cNvSpPr txBox="1"/>
+          <p:nvPr/>
+        </p:nvSpPr>
+        <p:spPr>
+          <a:xfrm>
+            <a:off x="640080" y="2596896"/>
+            <a:ext cx="2834639" cy="411480"/>
+          </a:xfrm>
+          <a:prstGeom prst="rect">
+            <a:avLst/>
+          </a:prstGeom>
+          <a:noFill/>
+        </p:spPr>
+        <p:txBody>
+          <a:bodyPr wrap="square" lIns="0" rIns="0" tIns="18288" bIns="18288" anchor="t">
+            <a:spAutoFit/>
+          </a:bodyPr>
+          <a:lstStyle/>
+          <a:p>
+            <a:pPr algn="l">
+              <a:spcAft>
+                <a:spcPts val="400"/>
+              </a:spcAft>
+            </a:pPr>
+            <a:r>
+              <a:rPr sz="1200" b="1">
                 <a:solidFill>
                   <a:srgbClr val="1B1F3B"/>
                 </a:solidFill>
                 <a:latin typeface="Calibri"/>
               </a:rPr>
-              <a:t>6 из 6</a:t>
-            </a:r>
-          </a:p>
-        </p:txBody>
-      </p:sp>
-      <p:sp>
-        <p:nvSpPr>
-          <p:cNvPr id="13" name="TextBox 12"/>
-          <p:cNvSpPr txBox="1"/>
-          <p:nvPr/>
-        </p:nvSpPr>
-        <p:spPr>
-          <a:xfrm>
-            <a:off x="4315968" y="2606040"/>
-            <a:ext cx="3566160" cy="320040"/>
+              <a:t>Целевая: gpt‑oss‑20b, промпт v1</a:t>
+            </a:r>
+          </a:p>
+        </p:txBody>
+      </p:sp>
+      <p:sp>
+        <p:nvSpPr>
+          <p:cNvPr id="25" name="TextBox 24"/>
+          <p:cNvSpPr txBox="1"/>
+          <p:nvPr/>
+        </p:nvSpPr>
+        <p:spPr>
+          <a:xfrm>
+            <a:off x="3657600" y="2596896"/>
+            <a:ext cx="1417320" cy="411480"/>
           </a:xfrm>
           <a:prstGeom prst="rect">
             <a:avLst/>
@@ -4021,27 +4488,27 @@
               </a:spcAft>
             </a:pPr>
             <a:r>
-              <a:rPr sz="1300" b="1">
-                <a:solidFill>
-                  <a:srgbClr val="EF3124"/>
-                </a:solidFill>
-                <a:latin typeface="Calibri"/>
-              </a:rPr>
-              <a:t>скрытых банкротств найдены</a:t>
-            </a:r>
-          </a:p>
-        </p:txBody>
-      </p:sp>
-      <p:sp>
-        <p:nvSpPr>
-          <p:cNvPr id="14" name="TextBox 13"/>
-          <p:cNvSpPr txBox="1"/>
-          <p:nvPr/>
-        </p:nvSpPr>
-        <p:spPr>
-          <a:xfrm>
-            <a:off x="4544568" y="2953512"/>
-            <a:ext cx="3108960" cy="457199"/>
+              <a:rPr sz="1300" b="0">
+                <a:solidFill>
+                  <a:srgbClr val="1A1A1A"/>
+                </a:solidFill>
+                <a:latin typeface="Calibri"/>
+              </a:rPr>
+              <a:t>40 %</a:t>
+            </a:r>
+          </a:p>
+        </p:txBody>
+      </p:sp>
+      <p:sp>
+        <p:nvSpPr>
+          <p:cNvPr id="26" name="TextBox 25"/>
+          <p:cNvSpPr txBox="1"/>
+          <p:nvPr/>
+        </p:nvSpPr>
+        <p:spPr>
+          <a:xfrm>
+            <a:off x="5257800" y="2596896"/>
+            <a:ext cx="1234440" cy="411480"/>
           </a:xfrm>
           <a:prstGeom prst="rect">
             <a:avLst/>
@@ -4060,32 +4527,186 @@
               </a:spcAft>
             </a:pPr>
             <a:r>
-              <a:rPr sz="1100" b="0">
-                <a:solidFill>
-                  <a:srgbClr val="5A6470"/>
-                </a:solidFill>
-                <a:latin typeface="Calibri"/>
-              </a:rPr>
-              <a:t>каждая компания с зелёной оценкой и банкротством получила вывод «работать только на условиях»</a:t>
-            </a:r>
-          </a:p>
-        </p:txBody>
-      </p:sp>
-      <p:sp>
-        <p:nvSpPr>
-          <p:cNvPr id="15" name="Rounded Rectangle 14"/>
+              <a:rPr sz="1300" b="0">
+                <a:solidFill>
+                  <a:srgbClr val="1A1A1A"/>
+                </a:solidFill>
+                <a:latin typeface="Calibri"/>
+              </a:rPr>
+              <a:t>100 %</a:t>
+            </a:r>
+          </a:p>
+        </p:txBody>
+      </p:sp>
+      <p:sp>
+        <p:nvSpPr>
+          <p:cNvPr id="27" name="TextBox 26"/>
+          <p:cNvSpPr txBox="1"/>
+          <p:nvPr/>
+        </p:nvSpPr>
+        <p:spPr>
+          <a:xfrm>
+            <a:off x="6675120" y="2596896"/>
+            <a:ext cx="960120" cy="411480"/>
+          </a:xfrm>
+          <a:prstGeom prst="rect">
+            <a:avLst/>
+          </a:prstGeom>
+          <a:noFill/>
+        </p:spPr>
+        <p:txBody>
+          <a:bodyPr wrap="square" lIns="0" rIns="0" tIns="18288" bIns="18288" anchor="t">
+            <a:spAutoFit/>
+          </a:bodyPr>
+          <a:lstStyle/>
+          <a:p>
+            <a:pPr algn="ctr">
+              <a:spcAft>
+                <a:spcPts val="400"/>
+              </a:spcAft>
+            </a:pPr>
+            <a:r>
+              <a:rPr sz="1300" b="0">
+                <a:solidFill>
+                  <a:srgbClr val="1A1A1A"/>
+                </a:solidFill>
+                <a:latin typeface="Calibri"/>
+              </a:rPr>
+              <a:t>20 %</a:t>
+            </a:r>
+          </a:p>
+        </p:txBody>
+      </p:sp>
+      <p:sp>
+        <p:nvSpPr>
+          <p:cNvPr id="28" name="TextBox 27"/>
+          <p:cNvSpPr txBox="1"/>
+          <p:nvPr/>
+        </p:nvSpPr>
+        <p:spPr>
+          <a:xfrm>
+            <a:off x="7818119" y="2596896"/>
+            <a:ext cx="1325880" cy="411480"/>
+          </a:xfrm>
+          <a:prstGeom prst="rect">
+            <a:avLst/>
+          </a:prstGeom>
+          <a:noFill/>
+        </p:spPr>
+        <p:txBody>
+          <a:bodyPr wrap="square" lIns="0" rIns="0" tIns="18288" bIns="18288" anchor="t">
+            <a:spAutoFit/>
+          </a:bodyPr>
+          <a:lstStyle/>
+          <a:p>
+            <a:pPr algn="ctr">
+              <a:spcAft>
+                <a:spcPts val="400"/>
+              </a:spcAft>
+            </a:pPr>
+            <a:r>
+              <a:rPr sz="1300" b="0">
+                <a:solidFill>
+                  <a:srgbClr val="1A1A1A"/>
+                </a:solidFill>
+                <a:latin typeface="Calibri"/>
+              </a:rPr>
+              <a:t>8 %</a:t>
+            </a:r>
+          </a:p>
+        </p:txBody>
+      </p:sp>
+      <p:sp>
+        <p:nvSpPr>
+          <p:cNvPr id="29" name="TextBox 28"/>
+          <p:cNvSpPr txBox="1"/>
+          <p:nvPr/>
+        </p:nvSpPr>
+        <p:spPr>
+          <a:xfrm>
+            <a:off x="9326880" y="2596896"/>
+            <a:ext cx="914400" cy="411480"/>
+          </a:xfrm>
+          <a:prstGeom prst="rect">
+            <a:avLst/>
+          </a:prstGeom>
+          <a:noFill/>
+        </p:spPr>
+        <p:txBody>
+          <a:bodyPr wrap="square" lIns="0" rIns="0" tIns="18288" bIns="18288" anchor="t">
+            <a:spAutoFit/>
+          </a:bodyPr>
+          <a:lstStyle/>
+          <a:p>
+            <a:pPr algn="ctr">
+              <a:spcAft>
+                <a:spcPts val="400"/>
+              </a:spcAft>
+            </a:pPr>
+            <a:r>
+              <a:rPr sz="1300" b="0">
+                <a:solidFill>
+                  <a:srgbClr val="1A1A1A"/>
+                </a:solidFill>
+                <a:latin typeface="Calibri"/>
+              </a:rPr>
+              <a:t>3,5</a:t>
+            </a:r>
+          </a:p>
+        </p:txBody>
+      </p:sp>
+      <p:sp>
+        <p:nvSpPr>
+          <p:cNvPr id="30" name="TextBox 29"/>
+          <p:cNvSpPr txBox="1"/>
+          <p:nvPr/>
+        </p:nvSpPr>
+        <p:spPr>
+          <a:xfrm>
+            <a:off x="10424159" y="2596896"/>
+            <a:ext cx="1133856" cy="411480"/>
+          </a:xfrm>
+          <a:prstGeom prst="rect">
+            <a:avLst/>
+          </a:prstGeom>
+          <a:noFill/>
+        </p:spPr>
+        <p:txBody>
+          <a:bodyPr wrap="square" lIns="0" rIns="0" tIns="18288" bIns="18288" anchor="t">
+            <a:spAutoFit/>
+          </a:bodyPr>
+          <a:lstStyle/>
+          <a:p>
+            <a:pPr algn="ctr">
+              <a:spcAft>
+                <a:spcPts val="400"/>
+              </a:spcAft>
+            </a:pPr>
+            <a:r>
+              <a:rPr sz="1300" b="0">
+                <a:solidFill>
+                  <a:srgbClr val="1A1A1A"/>
+                </a:solidFill>
+                <a:latin typeface="Calibri"/>
+              </a:rPr>
+              <a:t>34 с</a:t>
+            </a:r>
+          </a:p>
+        </p:txBody>
+      </p:sp>
+      <p:sp>
+        <p:nvSpPr>
+          <p:cNvPr id="31" name="Rectangle 30"/>
           <p:cNvSpPr/>
           <p:nvPr/>
         </p:nvSpPr>
         <p:spPr>
           <a:xfrm>
-            <a:off x="8083296" y="1417320"/>
-            <a:ext cx="3566160" cy="2103120"/>
-          </a:xfrm>
-          <a:prstGeom prst="roundRect">
-            <a:avLst>
-              <a:gd name="adj" fmla="val 5217"/>
-            </a:avLst>
+            <a:off x="548640" y="3054096"/>
+            <a:ext cx="11100816" cy="566928"/>
+          </a:xfrm>
+          <a:prstGeom prst="rect">
+            <a:avLst/>
           </a:prstGeom>
           <a:solidFill>
             <a:srgbClr val="F3F4F8"/>
@@ -4117,14 +4738,53 @@
       </p:sp>
       <p:sp>
         <p:nvSpPr>
-          <p:cNvPr id="16" name="TextBox 15"/>
-          <p:cNvSpPr txBox="1"/>
-          <p:nvPr/>
-        </p:nvSpPr>
-        <p:spPr>
-          <a:xfrm>
-            <a:off x="8083296" y="1645920"/>
-            <a:ext cx="3566160" cy="914400"/>
+          <p:cNvPr id="32" name="TextBox 31"/>
+          <p:cNvSpPr txBox="1"/>
+          <p:nvPr/>
+        </p:nvSpPr>
+        <p:spPr>
+          <a:xfrm>
+            <a:off x="640080" y="3163824"/>
+            <a:ext cx="2834639" cy="411480"/>
+          </a:xfrm>
+          <a:prstGeom prst="rect">
+            <a:avLst/>
+          </a:prstGeom>
+          <a:noFill/>
+        </p:spPr>
+        <p:txBody>
+          <a:bodyPr wrap="square" lIns="0" rIns="0" tIns="18288" bIns="18288" anchor="t">
+            <a:spAutoFit/>
+          </a:bodyPr>
+          <a:lstStyle/>
+          <a:p>
+            <a:pPr algn="l">
+              <a:spcAft>
+                <a:spcPts val="400"/>
+              </a:spcAft>
+            </a:pPr>
+            <a:r>
+              <a:rPr sz="1200" b="1">
+                <a:solidFill>
+                  <a:srgbClr val="1B1F3B"/>
+                </a:solidFill>
+                <a:latin typeface="Calibri"/>
+              </a:rPr>
+              <a:t>Целевая: gpt‑oss‑20b, промпт v2</a:t>
+            </a:r>
+          </a:p>
+        </p:txBody>
+      </p:sp>
+      <p:sp>
+        <p:nvSpPr>
+          <p:cNvPr id="33" name="TextBox 32"/>
+          <p:cNvSpPr txBox="1"/>
+          <p:nvPr/>
+        </p:nvSpPr>
+        <p:spPr>
+          <a:xfrm>
+            <a:off x="3657600" y="3163824"/>
+            <a:ext cx="1417320" cy="411480"/>
           </a:xfrm>
           <a:prstGeom prst="rect">
             <a:avLst/>
@@ -4143,27 +4803,27 @@
               </a:spcAft>
             </a:pPr>
             <a:r>
-              <a:rPr sz="4000" b="1">
-                <a:solidFill>
-                  <a:srgbClr val="1B1F3B"/>
-                </a:solidFill>
-                <a:latin typeface="Calibri"/>
-              </a:rPr>
-              <a:t>34–65 с</a:t>
-            </a:r>
-          </a:p>
-        </p:txBody>
-      </p:sp>
-      <p:sp>
-        <p:nvSpPr>
-          <p:cNvPr id="17" name="TextBox 16"/>
-          <p:cNvSpPr txBox="1"/>
-          <p:nvPr/>
-        </p:nvSpPr>
-        <p:spPr>
-          <a:xfrm>
-            <a:off x="8083296" y="2606040"/>
-            <a:ext cx="3566160" cy="320040"/>
+              <a:rPr sz="1300" b="0">
+                <a:solidFill>
+                  <a:srgbClr val="1A1A1A"/>
+                </a:solidFill>
+                <a:latin typeface="Calibri"/>
+              </a:rPr>
+              <a:t>прогон идёт</a:t>
+            </a:r>
+          </a:p>
+        </p:txBody>
+      </p:sp>
+      <p:sp>
+        <p:nvSpPr>
+          <p:cNvPr id="34" name="TextBox 33"/>
+          <p:cNvSpPr txBox="1"/>
+          <p:nvPr/>
+        </p:nvSpPr>
+        <p:spPr>
+          <a:xfrm>
+            <a:off x="5257800" y="3163824"/>
+            <a:ext cx="1234440" cy="411480"/>
           </a:xfrm>
           <a:prstGeom prst="rect">
             <a:avLst/>
@@ -4182,27 +4842,27 @@
               </a:spcAft>
             </a:pPr>
             <a:r>
-              <a:rPr sz="1300" b="1">
-                <a:solidFill>
-                  <a:srgbClr val="EF3124"/>
-                </a:solidFill>
-                <a:latin typeface="Calibri"/>
-              </a:rPr>
-              <a:t>на полный ответ</a:t>
-            </a:r>
-          </a:p>
-        </p:txBody>
-      </p:sp>
-      <p:sp>
-        <p:nvSpPr>
-          <p:cNvPr id="18" name="TextBox 17"/>
-          <p:cNvSpPr txBox="1"/>
-          <p:nvPr/>
-        </p:nvSpPr>
-        <p:spPr>
-          <a:xfrm>
-            <a:off x="8311896" y="2953512"/>
-            <a:ext cx="3108960" cy="457199"/>
+              <a:rPr sz="1300" b="0">
+                <a:solidFill>
+                  <a:srgbClr val="1A1A1A"/>
+                </a:solidFill>
+                <a:latin typeface="Calibri"/>
+              </a:rPr>
+              <a:t/>
+            </a:r>
+          </a:p>
+        </p:txBody>
+      </p:sp>
+      <p:sp>
+        <p:nvSpPr>
+          <p:cNvPr id="35" name="TextBox 34"/>
+          <p:cNvSpPr txBox="1"/>
+          <p:nvPr/>
+        </p:nvSpPr>
+        <p:spPr>
+          <a:xfrm>
+            <a:off x="6675120" y="3163824"/>
+            <a:ext cx="960120" cy="411480"/>
           </a:xfrm>
           <a:prstGeom prst="rect">
             <a:avLst/>
@@ -4221,31 +4881,187 @@
               </a:spcAft>
             </a:pPr>
             <a:r>
-              <a:rPr sz="1100" b="0">
+              <a:rPr sz="1300" b="0">
+                <a:solidFill>
+                  <a:srgbClr val="1A1A1A"/>
+                </a:solidFill>
+                <a:latin typeface="Calibri"/>
+              </a:rPr>
+              <a:t/>
+            </a:r>
+          </a:p>
+        </p:txBody>
+      </p:sp>
+      <p:sp>
+        <p:nvSpPr>
+          <p:cNvPr id="36" name="TextBox 35"/>
+          <p:cNvSpPr txBox="1"/>
+          <p:nvPr/>
+        </p:nvSpPr>
+        <p:spPr>
+          <a:xfrm>
+            <a:off x="7818119" y="3163824"/>
+            <a:ext cx="1325880" cy="411480"/>
+          </a:xfrm>
+          <a:prstGeom prst="rect">
+            <a:avLst/>
+          </a:prstGeom>
+          <a:noFill/>
+        </p:spPr>
+        <p:txBody>
+          <a:bodyPr wrap="square" lIns="0" rIns="0" tIns="18288" bIns="18288" anchor="t">
+            <a:spAutoFit/>
+          </a:bodyPr>
+          <a:lstStyle/>
+          <a:p>
+            <a:pPr algn="ctr">
+              <a:spcAft>
+                <a:spcPts val="400"/>
+              </a:spcAft>
+            </a:pPr>
+            <a:r>
+              <a:rPr sz="1300" b="0">
+                <a:solidFill>
+                  <a:srgbClr val="1A1A1A"/>
+                </a:solidFill>
+                <a:latin typeface="Calibri"/>
+              </a:rPr>
+              <a:t/>
+            </a:r>
+          </a:p>
+        </p:txBody>
+      </p:sp>
+      <p:sp>
+        <p:nvSpPr>
+          <p:cNvPr id="37" name="TextBox 36"/>
+          <p:cNvSpPr txBox="1"/>
+          <p:nvPr/>
+        </p:nvSpPr>
+        <p:spPr>
+          <a:xfrm>
+            <a:off x="9326880" y="3163824"/>
+            <a:ext cx="914400" cy="411480"/>
+          </a:xfrm>
+          <a:prstGeom prst="rect">
+            <a:avLst/>
+          </a:prstGeom>
+          <a:noFill/>
+        </p:spPr>
+        <p:txBody>
+          <a:bodyPr wrap="square" lIns="0" rIns="0" tIns="18288" bIns="18288" anchor="t">
+            <a:spAutoFit/>
+          </a:bodyPr>
+          <a:lstStyle/>
+          <a:p>
+            <a:pPr algn="ctr">
+              <a:spcAft>
+                <a:spcPts val="400"/>
+              </a:spcAft>
+            </a:pPr>
+            <a:r>
+              <a:rPr sz="1300" b="0">
+                <a:solidFill>
+                  <a:srgbClr val="1A1A1A"/>
+                </a:solidFill>
+                <a:latin typeface="Calibri"/>
+              </a:rPr>
+              <a:t/>
+            </a:r>
+          </a:p>
+        </p:txBody>
+      </p:sp>
+      <p:sp>
+        <p:nvSpPr>
+          <p:cNvPr id="38" name="TextBox 37"/>
+          <p:cNvSpPr txBox="1"/>
+          <p:nvPr/>
+        </p:nvSpPr>
+        <p:spPr>
+          <a:xfrm>
+            <a:off x="10424159" y="3163824"/>
+            <a:ext cx="1133856" cy="411480"/>
+          </a:xfrm>
+          <a:prstGeom prst="rect">
+            <a:avLst/>
+          </a:prstGeom>
+          <a:noFill/>
+        </p:spPr>
+        <p:txBody>
+          <a:bodyPr wrap="square" lIns="0" rIns="0" tIns="18288" bIns="18288" anchor="t">
+            <a:spAutoFit/>
+          </a:bodyPr>
+          <a:lstStyle/>
+          <a:p>
+            <a:pPr algn="ctr">
+              <a:spcAft>
+                <a:spcPts val="400"/>
+              </a:spcAft>
+            </a:pPr>
+            <a:r>
+              <a:rPr sz="1300" b="0">
+                <a:solidFill>
+                  <a:srgbClr val="1A1A1A"/>
+                </a:solidFill>
+                <a:latin typeface="Calibri"/>
+              </a:rPr>
+              <a:t/>
+            </a:r>
+          </a:p>
+        </p:txBody>
+      </p:sp>
+      <p:sp>
+        <p:nvSpPr>
+          <p:cNvPr id="39" name="TextBox 38"/>
+          <p:cNvSpPr txBox="1"/>
+          <p:nvPr/>
+        </p:nvSpPr>
+        <p:spPr>
+          <a:xfrm>
+            <a:off x="548640" y="3703320"/>
+            <a:ext cx="11100816" cy="365760"/>
+          </a:xfrm>
+          <a:prstGeom prst="rect">
+            <a:avLst/>
+          </a:prstGeom>
+          <a:noFill/>
+        </p:spPr>
+        <p:txBody>
+          <a:bodyPr wrap="square" lIns="0" rIns="0" tIns="18288" bIns="18288" anchor="t">
+            <a:spAutoFit/>
+          </a:bodyPr>
+          <a:lstStyle/>
+          <a:p>
+            <a:pPr algn="l">
+              <a:spcAft>
+                <a:spcPts val="400"/>
+              </a:spcAft>
+            </a:pPr>
+            <a:r>
+              <a:rPr sz="1150" b="0">
                 <a:solidFill>
                   <a:srgbClr val="5A6470"/>
                 </a:solidFill>
                 <a:latin typeface="Calibri"/>
               </a:rPr>
-              <a:t>столько занимает проверка одной компании на платных моделях; на бесплатной до трёх минут</a:t>
-            </a:r>
-          </a:p>
-        </p:txBody>
-      </p:sp>
-      <p:sp>
-        <p:nvSpPr>
-          <p:cNvPr id="19" name="Rounded Rectangle 18"/>
+              <a:t>Целевая модель ни разу не ответила по существу там, где данных нет, и нашла все скрытые банкротства. Проваливается она на форме: в 18 ответах из 50 нет даты отчёта, в 22 не названы обязательные факты, в 8 ссылки на несуществующие поля.</a:t>
+            </a:r>
+          </a:p>
+        </p:txBody>
+      </p:sp>
+      <p:sp>
+        <p:nvSpPr>
+          <p:cNvPr id="40" name="Rounded Rectangle 39"/>
           <p:cNvSpPr/>
           <p:nvPr/>
         </p:nvSpPr>
         <p:spPr>
           <a:xfrm>
-            <a:off x="548640" y="3840480"/>
-            <a:ext cx="11100816" cy="2240280"/>
+            <a:off x="548640" y="4343400"/>
+            <a:ext cx="11100816" cy="1737360"/>
           </a:xfrm>
           <a:prstGeom prst="roundRect">
             <a:avLst>
-              <a:gd name="adj" fmla="val 4897"/>
+              <a:gd name="adj" fmla="val 6315"/>
             </a:avLst>
           </a:prstGeom>
           <a:solidFill>
@@ -4278,14 +5094,14 @@
       </p:sp>
       <p:sp>
         <p:nvSpPr>
-          <p:cNvPr id="20" name="TextBox 19"/>
-          <p:cNvSpPr txBox="1"/>
-          <p:nvPr/>
-        </p:nvSpPr>
-        <p:spPr>
-          <a:xfrm>
-            <a:off x="822959" y="4005072"/>
-            <a:ext cx="10552176" cy="1965960"/>
+          <p:cNvPr id="41" name="TextBox 40"/>
+          <p:cNvSpPr txBox="1"/>
+          <p:nvPr/>
+        </p:nvSpPr>
+        <p:spPr>
+          <a:xfrm>
+            <a:off x="822959" y="4507992"/>
+            <a:ext cx="10552176" cy="1463039"/>
           </a:xfrm>
           <a:prstGeom prst="rect">
             <a:avLst/>
@@ -4310,7 +5126,7 @@
                 </a:solidFill>
                 <a:latin typeface="Calibri"/>
               </a:rPr>
-              <a:t>Что показали первые прогоны эталона</a:t>
+              <a:t>Что с этим делаем</a:t>
             </a:r>
           </a:p>
           <a:p>
@@ -4326,7 +5142,7 @@
                 </a:solidFill>
                 <a:latin typeface="Calibri"/>
               </a:rPr>
-              <a:t>Первые двадцать вопросов нашли больше ошибок в самом тестировании, чем в агенте: судья обращался не по тому адресу, проверка ссылок портила адрес поля, поиск компании не понимал падежи, эталон требовал слово буквально. Всё исправлено и закрыто тестами. У агента три слабости: пишет «нет» там, где правильно «в отчёте не найдено», иногда даёт полную сводку вместо ответа на вопрос, изредка категоричен. Их правим в промпте после прогона. Итоговые цифры по двум моделям покажем на встрече с кейсодателем.</a:t>
+              <a:t>Всё, что модель забывает или путает, ловит код: пустой ответ, категоричную фразу, сводку вместо ответа на вопрос, ссылку на пустое или, наоборот, заполненное поле. Промпт v2 стал короче и жёстче: рекомендацию модель не выбирает, «не найдено» вместо «нет», отдельные правила про суды и приставов. Первые двадцать вопросов эталона нашли больше ошибок в самом тестировании, чем в агенте, все закрыты тестами.</a:t>
             </a:r>
           </a:p>
         </p:txBody>
@@ -7066,7 +7882,7 @@
                 </a:solidFill>
                 <a:latin typeface="Calibri"/>
               </a:rPr>
-              <a:t>Сделано: сквозной прототип, 175 тестов, эталон из 50 вопросов</a:t>
+              <a:t>Сделано: сквозной прототип, 198 тестов, эталон из 50 вопросов</a:t>
             </a:r>
           </a:p>
           <a:p>
@@ -11777,7 +12593,7 @@
                 </a:solidFill>
                 <a:latin typeface="Calibri"/>
               </a:rPr>
-              <a:t>175 автоматических тестов</a:t>
+              <a:t>198 автоматических тестов</a:t>
             </a:r>
           </a:p>
           <a:p>

--- a/deliverables/interim/PRESENTATION_INTERIM.pptx
+++ b/deliverables/interim/PRESENTATION_INTERIM.pptx
@@ -4809,7 +4809,7 @@
                 </a:solidFill>
                 <a:latin typeface="Calibri"/>
               </a:rPr>
-              <a:t>прогон идёт</a:t>
+              <a:t>53 %</a:t>
             </a:r>
           </a:p>
         </p:txBody>
@@ -4848,7 +4848,7 @@
                 </a:solidFill>
                 <a:latin typeface="Calibri"/>
               </a:rPr>
-              <a:t/>
+              <a:t>92 %</a:t>
             </a:r>
           </a:p>
         </p:txBody>
@@ -4887,7 +4887,7 @@
                 </a:solidFill>
                 <a:latin typeface="Calibri"/>
               </a:rPr>
-              <a:t/>
+              <a:t>22 %</a:t>
             </a:r>
           </a:p>
         </p:txBody>
@@ -4926,7 +4926,7 @@
                 </a:solidFill>
                 <a:latin typeface="Calibri"/>
               </a:rPr>
-              <a:t/>
+              <a:t>0 %</a:t>
             </a:r>
           </a:p>
         </p:txBody>
@@ -4965,7 +4965,7 @@
                 </a:solidFill>
                 <a:latin typeface="Calibri"/>
               </a:rPr>
-              <a:t/>
+              <a:t>4,2</a:t>
             </a:r>
           </a:p>
         </p:txBody>
@@ -5004,7 +5004,7 @@
                 </a:solidFill>
                 <a:latin typeface="Calibri"/>
               </a:rPr>
-              <a:t/>
+              <a:t>37 с</a:t>
             </a:r>
           </a:p>
         </p:txBody>
@@ -5018,7 +5018,7 @@
         <p:spPr>
           <a:xfrm>
             <a:off x="548640" y="3703320"/>
-            <a:ext cx="11100816" cy="365760"/>
+            <a:ext cx="11100816" cy="548640"/>
           </a:xfrm>
           <a:prstGeom prst="rect">
             <a:avLst/>
@@ -5043,7 +5043,7 @@
                 </a:solidFill>
                 <a:latin typeface="Calibri"/>
               </a:rPr>
-              <a:t>Целевая модель ни разу не ответила по существу там, где данных нет, и нашла все скрытые банкротства. Проваливается она на форме: в 18 ответах из 50 нет даты отчёта, в 22 не названы обязательные факты, в 8 ссылки на несуществующие поля.</a:t>
+              <a:t>Целевая модель проваливается на форме, а не на фактах: с промптом v1 в 18 ответах из 50 нет даты отчёта, в 22 не названы обязательные факты. Промпт v2 с проверками формы кодом: дата есть в 49 из 50, пропусков критичных фактов ноль, оценок 5 у судьи 40 из 50 вместо 22. Хуже стало с вопросами «можно ли давать отсрочку»: короткий ответ без рекомендации, это следующая правка.</a:t>
             </a:r>
           </a:p>
         </p:txBody>
@@ -5056,12 +5056,12 @@
         </p:nvSpPr>
         <p:spPr>
           <a:xfrm>
-            <a:off x="548640" y="4343400"/>
-            <a:ext cx="11100816" cy="1737360"/>
+            <a:off x="548640" y="4526280"/>
+            <a:ext cx="11100816" cy="1554480"/>
           </a:xfrm>
           <a:prstGeom prst="roundRect">
             <a:avLst>
-              <a:gd name="adj" fmla="val 6315"/>
+              <a:gd name="adj" fmla="val 7058"/>
             </a:avLst>
           </a:prstGeom>
           <a:solidFill>
@@ -5100,8 +5100,8 @@
         </p:nvSpPr>
         <p:spPr>
           <a:xfrm>
-            <a:off x="822959" y="4507992"/>
-            <a:ext cx="10552176" cy="1463039"/>
+            <a:off x="822959" y="4690872"/>
+            <a:ext cx="10552176" cy="1280160"/>
           </a:xfrm>
           <a:prstGeom prst="rect">
             <a:avLst/>

--- a/deliverables/interim/PRESENTATION_INTERIM.pptx
+++ b/deliverables/interim/PRESENTATION_INTERIM.pptx
@@ -3758,7 +3758,7 @@
         <p:spPr>
           <a:xfrm>
             <a:off x="548640" y="1417320"/>
-            <a:ext cx="11100816" cy="502920"/>
+            <a:ext cx="11100816" cy="548640"/>
           </a:xfrm>
           <a:prstGeom prst="rect">
             <a:avLst/>
@@ -3799,8 +3799,8 @@
         </p:nvSpPr>
         <p:spPr>
           <a:xfrm>
-            <a:off x="640080" y="1490472"/>
-            <a:ext cx="2834639" cy="411480"/>
+            <a:off x="621792" y="1490472"/>
+            <a:ext cx="2688336" cy="457200"/>
           </a:xfrm>
           <a:prstGeom prst="rect">
             <a:avLst/>
@@ -3819,7 +3819,7 @@
               </a:spcAft>
             </a:pPr>
             <a:r>
-              <a:rPr sz="1000" b="1">
+              <a:rPr sz="950" b="1">
                 <a:solidFill>
                   <a:srgbClr val="FFFFFF"/>
                 </a:solidFill>
@@ -3838,8 +3838,8 @@
         </p:nvSpPr>
         <p:spPr>
           <a:xfrm>
-            <a:off x="3657600" y="1490472"/>
-            <a:ext cx="1417320" cy="411480"/>
+            <a:off x="3456432" y="1490472"/>
+            <a:ext cx="1316736" cy="457200"/>
           </a:xfrm>
           <a:prstGeom prst="rect">
             <a:avLst/>
@@ -3858,7 +3858,7 @@
               </a:spcAft>
             </a:pPr>
             <a:r>
-              <a:rPr sz="1000" b="1">
+              <a:rPr sz="950" b="1">
                 <a:solidFill>
                   <a:srgbClr val="FFFFFF"/>
                 </a:solidFill>
@@ -3877,8 +3877,8 @@
         </p:nvSpPr>
         <p:spPr>
           <a:xfrm>
-            <a:off x="5257800" y="1490472"/>
-            <a:ext cx="1234440" cy="411480"/>
+            <a:off x="4919472" y="1490472"/>
+            <a:ext cx="1179576" cy="457200"/>
           </a:xfrm>
           <a:prstGeom prst="rect">
             <a:avLst/>
@@ -3897,7 +3897,7 @@
               </a:spcAft>
             </a:pPr>
             <a:r>
-              <a:rPr sz="1000" b="1">
+              <a:rPr sz="950" b="1">
                 <a:solidFill>
                   <a:srgbClr val="FFFFFF"/>
                 </a:solidFill>
@@ -3916,8 +3916,8 @@
         </p:nvSpPr>
         <p:spPr>
           <a:xfrm>
-            <a:off x="6675120" y="1490472"/>
-            <a:ext cx="960120" cy="411480"/>
+            <a:off x="6245352" y="1490472"/>
+            <a:ext cx="1179576" cy="457200"/>
           </a:xfrm>
           <a:prstGeom prst="rect">
             <a:avLst/>
@@ -3936,13 +3936,13 @@
               </a:spcAft>
             </a:pPr>
             <a:r>
-              <a:rPr sz="1000" b="1">
+              <a:rPr sz="950" b="1">
                 <a:solidFill>
                   <a:srgbClr val="FFFFFF"/>
                 </a:solidFill>
                 <a:latin typeface="Calibri"/>
               </a:rPr>
-              <a:t>Выдумок</a:t>
+              <a:t>Выдуманных фактов</a:t>
             </a:r>
           </a:p>
         </p:txBody>
@@ -3955,8 +3955,8 @@
         </p:nvSpPr>
         <p:spPr>
           <a:xfrm>
-            <a:off x="7818119" y="1490472"/>
-            <a:ext cx="1325880" cy="411480"/>
+            <a:off x="7571232" y="1490472"/>
+            <a:ext cx="1042416" cy="457200"/>
           </a:xfrm>
           <a:prstGeom prst="rect">
             <a:avLst/>
@@ -3975,12 +3975,51 @@
               </a:spcAft>
             </a:pPr>
             <a:r>
-              <a:rPr sz="1000" b="1">
+              <a:rPr sz="950" b="1">
                 <a:solidFill>
                   <a:srgbClr val="FFFFFF"/>
                 </a:solidFill>
                 <a:latin typeface="Calibri"/>
               </a:rPr>
+              <a:t>Неверных ссылок</a:t>
+            </a:r>
+          </a:p>
+        </p:txBody>
+      </p:sp>
+      <p:sp>
+        <p:nvSpPr>
+          <p:cNvPr id="13" name="TextBox 12"/>
+          <p:cNvSpPr txBox="1"/>
+          <p:nvPr/>
+        </p:nvSpPr>
+        <p:spPr>
+          <a:xfrm>
+            <a:off x="8759952" y="1490472"/>
+            <a:ext cx="1225296" cy="457200"/>
+          </a:xfrm>
+          <a:prstGeom prst="rect">
+            <a:avLst/>
+          </a:prstGeom>
+          <a:noFill/>
+        </p:spPr>
+        <p:txBody>
+          <a:bodyPr wrap="square" lIns="0" rIns="0" tIns="18288" bIns="18288" anchor="t">
+            <a:spAutoFit/>
+          </a:bodyPr>
+          <a:lstStyle/>
+          <a:p>
+            <a:pPr algn="ctr">
+              <a:spcAft>
+                <a:spcPts val="400"/>
+              </a:spcAft>
+            </a:pPr>
+            <a:r>
+              <a:rPr sz="950" b="1">
+                <a:solidFill>
+                  <a:srgbClr val="FFFFFF"/>
+                </a:solidFill>
+                <a:latin typeface="Calibri"/>
+              </a:rPr>
               <a:t>Пропущено критичных</a:t>
             </a:r>
           </a:p>
@@ -3988,14 +4027,14 @@
       </p:sp>
       <p:sp>
         <p:nvSpPr>
-          <p:cNvPr id="13" name="TextBox 12"/>
-          <p:cNvSpPr txBox="1"/>
-          <p:nvPr/>
-        </p:nvSpPr>
-        <p:spPr>
-          <a:xfrm>
-            <a:off x="9326880" y="1490472"/>
-            <a:ext cx="914400" cy="411480"/>
+          <p:cNvPr id="14" name="TextBox 13"/>
+          <p:cNvSpPr txBox="1"/>
+          <p:nvPr/>
+        </p:nvSpPr>
+        <p:spPr>
+          <a:xfrm>
+            <a:off x="10131552" y="1490472"/>
+            <a:ext cx="676656" cy="457200"/>
           </a:xfrm>
           <a:prstGeom prst="rect">
             <a:avLst/>
@@ -4014,7 +4053,7 @@
               </a:spcAft>
             </a:pPr>
             <a:r>
-              <a:rPr sz="1000" b="1">
+              <a:rPr sz="950" b="1">
                 <a:solidFill>
                   <a:srgbClr val="FFFFFF"/>
                 </a:solidFill>
@@ -4027,14 +4066,14 @@
       </p:sp>
       <p:sp>
         <p:nvSpPr>
-          <p:cNvPr id="14" name="TextBox 13"/>
-          <p:cNvSpPr txBox="1"/>
-          <p:nvPr/>
-        </p:nvSpPr>
-        <p:spPr>
-          <a:xfrm>
-            <a:off x="10424159" y="1490472"/>
-            <a:ext cx="1133856" cy="411480"/>
+          <p:cNvPr id="15" name="TextBox 14"/>
+          <p:cNvSpPr txBox="1"/>
+          <p:nvPr/>
+        </p:nvSpPr>
+        <p:spPr>
+          <a:xfrm>
+            <a:off x="10954512" y="1490472"/>
+            <a:ext cx="621792" cy="457200"/>
           </a:xfrm>
           <a:prstGeom prst="rect">
             <a:avLst/>
@@ -4053,26 +4092,26 @@
               </a:spcAft>
             </a:pPr>
             <a:r>
-              <a:rPr sz="1000" b="1">
+              <a:rPr sz="950" b="1">
                 <a:solidFill>
                   <a:srgbClr val="FFFFFF"/>
                 </a:solidFill>
                 <a:latin typeface="Calibri"/>
               </a:rPr>
-              <a:t>Время ответа</a:t>
-            </a:r>
-          </a:p>
-        </p:txBody>
-      </p:sp>
-      <p:sp>
-        <p:nvSpPr>
-          <p:cNvPr id="15" name="Rectangle 14"/>
+              <a:t>Время</a:t>
+            </a:r>
+          </a:p>
+        </p:txBody>
+      </p:sp>
+      <p:sp>
+        <p:nvSpPr>
+          <p:cNvPr id="16" name="Rectangle 15"/>
           <p:cNvSpPr/>
           <p:nvPr/>
         </p:nvSpPr>
         <p:spPr>
           <a:xfrm>
-            <a:off x="548640" y="1920240"/>
+            <a:off x="548640" y="1965960"/>
             <a:ext cx="11100816" cy="566928"/>
           </a:xfrm>
           <a:prstGeom prst="rect">
@@ -4108,14 +4147,14 @@
       </p:sp>
       <p:sp>
         <p:nvSpPr>
-          <p:cNvPr id="16" name="TextBox 15"/>
-          <p:cNvSpPr txBox="1"/>
-          <p:nvPr/>
-        </p:nvSpPr>
-        <p:spPr>
-          <a:xfrm>
-            <a:off x="640080" y="2029968"/>
-            <a:ext cx="2834639" cy="411480"/>
+          <p:cNvPr id="17" name="TextBox 16"/>
+          <p:cNvSpPr txBox="1"/>
+          <p:nvPr/>
+        </p:nvSpPr>
+        <p:spPr>
+          <a:xfrm>
+            <a:off x="621792" y="2075688"/>
+            <a:ext cx="2688336" cy="411480"/>
           </a:xfrm>
           <a:prstGeom prst="rect">
             <a:avLst/>
@@ -4147,14 +4186,14 @@
       </p:sp>
       <p:sp>
         <p:nvSpPr>
-          <p:cNvPr id="17" name="TextBox 16"/>
-          <p:cNvSpPr txBox="1"/>
-          <p:nvPr/>
-        </p:nvSpPr>
-        <p:spPr>
-          <a:xfrm>
-            <a:off x="3657600" y="2029968"/>
-            <a:ext cx="1417320" cy="411480"/>
+          <p:cNvPr id="18" name="TextBox 17"/>
+          <p:cNvSpPr txBox="1"/>
+          <p:nvPr/>
+        </p:nvSpPr>
+        <p:spPr>
+          <a:xfrm>
+            <a:off x="3456432" y="2075688"/>
+            <a:ext cx="1316736" cy="411480"/>
           </a:xfrm>
           <a:prstGeom prst="rect">
             <a:avLst/>
@@ -4179,21 +4218,21 @@
                 </a:solidFill>
                 <a:latin typeface="Calibri"/>
               </a:rPr>
-              <a:t>74 %</a:t>
-            </a:r>
-          </a:p>
-        </p:txBody>
-      </p:sp>
-      <p:sp>
-        <p:nvSpPr>
-          <p:cNvPr id="18" name="TextBox 17"/>
-          <p:cNvSpPr txBox="1"/>
-          <p:nvPr/>
-        </p:nvSpPr>
-        <p:spPr>
-          <a:xfrm>
-            <a:off x="5257800" y="2029968"/>
-            <a:ext cx="1234440" cy="411480"/>
+              <a:t>76 %</a:t>
+            </a:r>
+          </a:p>
+        </p:txBody>
+      </p:sp>
+      <p:sp>
+        <p:nvSpPr>
+          <p:cNvPr id="19" name="TextBox 18"/>
+          <p:cNvSpPr txBox="1"/>
+          <p:nvPr/>
+        </p:nvSpPr>
+        <p:spPr>
+          <a:xfrm>
+            <a:off x="4919472" y="2075688"/>
+            <a:ext cx="1179576" cy="411480"/>
           </a:xfrm>
           <a:prstGeom prst="rect">
             <a:avLst/>
@@ -4225,14 +4264,14 @@
       </p:sp>
       <p:sp>
         <p:nvSpPr>
-          <p:cNvPr id="19" name="TextBox 18"/>
-          <p:cNvSpPr txBox="1"/>
-          <p:nvPr/>
-        </p:nvSpPr>
-        <p:spPr>
-          <a:xfrm>
-            <a:off x="6675120" y="2029968"/>
-            <a:ext cx="960120" cy="411480"/>
+          <p:cNvPr id="20" name="TextBox 19"/>
+          <p:cNvSpPr txBox="1"/>
+          <p:nvPr/>
+        </p:nvSpPr>
+        <p:spPr>
+          <a:xfrm>
+            <a:off x="6245352" y="2075688"/>
+            <a:ext cx="1179576" cy="411480"/>
           </a:xfrm>
           <a:prstGeom prst="rect">
             <a:avLst/>
@@ -4257,21 +4296,21 @@
                 </a:solidFill>
                 <a:latin typeface="Calibri"/>
               </a:rPr>
-              <a:t>8 %</a:t>
-            </a:r>
-          </a:p>
-        </p:txBody>
-      </p:sp>
-      <p:sp>
-        <p:nvSpPr>
-          <p:cNvPr id="20" name="TextBox 19"/>
-          <p:cNvSpPr txBox="1"/>
-          <p:nvPr/>
-        </p:nvSpPr>
-        <p:spPr>
-          <a:xfrm>
-            <a:off x="7818119" y="2029968"/>
-            <a:ext cx="1325880" cy="411480"/>
+              <a:t>2 %</a:t>
+            </a:r>
+          </a:p>
+        </p:txBody>
+      </p:sp>
+      <p:sp>
+        <p:nvSpPr>
+          <p:cNvPr id="21" name="TextBox 20"/>
+          <p:cNvSpPr txBox="1"/>
+          <p:nvPr/>
+        </p:nvSpPr>
+        <p:spPr>
+          <a:xfrm>
+            <a:off x="7571232" y="2075688"/>
+            <a:ext cx="1042416" cy="411480"/>
           </a:xfrm>
           <a:prstGeom prst="rect">
             <a:avLst/>
@@ -4296,6 +4335,45 @@
                 </a:solidFill>
                 <a:latin typeface="Calibri"/>
               </a:rPr>
+              <a:t>2 %</a:t>
+            </a:r>
+          </a:p>
+        </p:txBody>
+      </p:sp>
+      <p:sp>
+        <p:nvSpPr>
+          <p:cNvPr id="22" name="TextBox 21"/>
+          <p:cNvSpPr txBox="1"/>
+          <p:nvPr/>
+        </p:nvSpPr>
+        <p:spPr>
+          <a:xfrm>
+            <a:off x="8759952" y="2075688"/>
+            <a:ext cx="1225296" cy="411480"/>
+          </a:xfrm>
+          <a:prstGeom prst="rect">
+            <a:avLst/>
+          </a:prstGeom>
+          <a:noFill/>
+        </p:spPr>
+        <p:txBody>
+          <a:bodyPr wrap="square" lIns="0" rIns="0" tIns="18288" bIns="18288" anchor="t">
+            <a:spAutoFit/>
+          </a:bodyPr>
+          <a:lstStyle/>
+          <a:p>
+            <a:pPr algn="ctr">
+              <a:spcAft>
+                <a:spcPts val="400"/>
+              </a:spcAft>
+            </a:pPr>
+            <a:r>
+              <a:rPr sz="1300" b="0">
+                <a:solidFill>
+                  <a:srgbClr val="1A1A1A"/>
+                </a:solidFill>
+                <a:latin typeface="Calibri"/>
+              </a:rPr>
               <a:t>0 %</a:t>
             </a:r>
           </a:p>
@@ -4303,14 +4381,14 @@
       </p:sp>
       <p:sp>
         <p:nvSpPr>
-          <p:cNvPr id="21" name="TextBox 20"/>
-          <p:cNvSpPr txBox="1"/>
-          <p:nvPr/>
-        </p:nvSpPr>
-        <p:spPr>
-          <a:xfrm>
-            <a:off x="9326880" y="2029968"/>
-            <a:ext cx="914400" cy="411480"/>
+          <p:cNvPr id="23" name="TextBox 22"/>
+          <p:cNvSpPr txBox="1"/>
+          <p:nvPr/>
+        </p:nvSpPr>
+        <p:spPr>
+          <a:xfrm>
+            <a:off x="10131552" y="2075688"/>
+            <a:ext cx="676656" cy="411480"/>
           </a:xfrm>
           <a:prstGeom prst="rect">
             <a:avLst/>
@@ -4342,14 +4420,14 @@
       </p:sp>
       <p:sp>
         <p:nvSpPr>
-          <p:cNvPr id="22" name="TextBox 21"/>
-          <p:cNvSpPr txBox="1"/>
-          <p:nvPr/>
-        </p:nvSpPr>
-        <p:spPr>
-          <a:xfrm>
-            <a:off x="10424159" y="2029968"/>
-            <a:ext cx="1133856" cy="411480"/>
+          <p:cNvPr id="24" name="TextBox 23"/>
+          <p:cNvSpPr txBox="1"/>
+          <p:nvPr/>
+        </p:nvSpPr>
+        <p:spPr>
+          <a:xfrm>
+            <a:off x="10954512" y="2075688"/>
+            <a:ext cx="621792" cy="411480"/>
           </a:xfrm>
           <a:prstGeom prst="rect">
             <a:avLst/>
@@ -4381,13 +4459,13 @@
       </p:sp>
       <p:sp>
         <p:nvSpPr>
-          <p:cNvPr id="23" name="Rectangle 22"/>
+          <p:cNvPr id="25" name="Rectangle 24"/>
           <p:cNvSpPr/>
           <p:nvPr/>
         </p:nvSpPr>
         <p:spPr>
           <a:xfrm>
-            <a:off x="548640" y="2487168"/>
+            <a:off x="548640" y="2532888"/>
             <a:ext cx="11100816" cy="566928"/>
           </a:xfrm>
           <a:prstGeom prst="rect">
@@ -4423,14 +4501,14 @@
       </p:sp>
       <p:sp>
         <p:nvSpPr>
-          <p:cNvPr id="24" name="TextBox 23"/>
-          <p:cNvSpPr txBox="1"/>
-          <p:nvPr/>
-        </p:nvSpPr>
-        <p:spPr>
-          <a:xfrm>
-            <a:off x="640080" y="2596896"/>
-            <a:ext cx="2834639" cy="411480"/>
+          <p:cNvPr id="26" name="TextBox 25"/>
+          <p:cNvSpPr txBox="1"/>
+          <p:nvPr/>
+        </p:nvSpPr>
+        <p:spPr>
+          <a:xfrm>
+            <a:off x="621792" y="2642616"/>
+            <a:ext cx="2688336" cy="411480"/>
           </a:xfrm>
           <a:prstGeom prst="rect">
             <a:avLst/>
@@ -4462,14 +4540,14 @@
       </p:sp>
       <p:sp>
         <p:nvSpPr>
-          <p:cNvPr id="25" name="TextBox 24"/>
-          <p:cNvSpPr txBox="1"/>
-          <p:nvPr/>
-        </p:nvSpPr>
-        <p:spPr>
-          <a:xfrm>
-            <a:off x="3657600" y="2596896"/>
-            <a:ext cx="1417320" cy="411480"/>
+          <p:cNvPr id="27" name="TextBox 26"/>
+          <p:cNvSpPr txBox="1"/>
+          <p:nvPr/>
+        </p:nvSpPr>
+        <p:spPr>
+          <a:xfrm>
+            <a:off x="3456432" y="2642616"/>
+            <a:ext cx="1316736" cy="411480"/>
           </a:xfrm>
           <a:prstGeom prst="rect">
             <a:avLst/>
@@ -4494,21 +4572,21 @@
                 </a:solidFill>
                 <a:latin typeface="Calibri"/>
               </a:rPr>
-              <a:t>40 %</a:t>
-            </a:r>
-          </a:p>
-        </p:txBody>
-      </p:sp>
-      <p:sp>
-        <p:nvSpPr>
-          <p:cNvPr id="26" name="TextBox 25"/>
-          <p:cNvSpPr txBox="1"/>
-          <p:nvPr/>
-        </p:nvSpPr>
-        <p:spPr>
-          <a:xfrm>
-            <a:off x="5257800" y="2596896"/>
-            <a:ext cx="1234440" cy="411480"/>
+              <a:t>45 %</a:t>
+            </a:r>
+          </a:p>
+        </p:txBody>
+      </p:sp>
+      <p:sp>
+        <p:nvSpPr>
+          <p:cNvPr id="28" name="TextBox 27"/>
+          <p:cNvSpPr txBox="1"/>
+          <p:nvPr/>
+        </p:nvSpPr>
+        <p:spPr>
+          <a:xfrm>
+            <a:off x="4919472" y="2642616"/>
+            <a:ext cx="1179576" cy="411480"/>
           </a:xfrm>
           <a:prstGeom prst="rect">
             <a:avLst/>
@@ -4540,14 +4618,14 @@
       </p:sp>
       <p:sp>
         <p:nvSpPr>
-          <p:cNvPr id="27" name="TextBox 26"/>
-          <p:cNvSpPr txBox="1"/>
-          <p:nvPr/>
-        </p:nvSpPr>
-        <p:spPr>
-          <a:xfrm>
-            <a:off x="6675120" y="2596896"/>
-            <a:ext cx="960120" cy="411480"/>
+          <p:cNvPr id="29" name="TextBox 28"/>
+          <p:cNvSpPr txBox="1"/>
+          <p:nvPr/>
+        </p:nvSpPr>
+        <p:spPr>
+          <a:xfrm>
+            <a:off x="6245352" y="2642616"/>
+            <a:ext cx="1179576" cy="411480"/>
           </a:xfrm>
           <a:prstGeom prst="rect">
             <a:avLst/>
@@ -4572,21 +4650,21 @@
                 </a:solidFill>
                 <a:latin typeface="Calibri"/>
               </a:rPr>
-              <a:t>20 %</a:t>
-            </a:r>
-          </a:p>
-        </p:txBody>
-      </p:sp>
-      <p:sp>
-        <p:nvSpPr>
-          <p:cNvPr id="28" name="TextBox 27"/>
-          <p:cNvSpPr txBox="1"/>
-          <p:nvPr/>
-        </p:nvSpPr>
-        <p:spPr>
-          <a:xfrm>
-            <a:off x="7818119" y="2596896"/>
-            <a:ext cx="1325880" cy="411480"/>
+              <a:t>6 %</a:t>
+            </a:r>
+          </a:p>
+        </p:txBody>
+      </p:sp>
+      <p:sp>
+        <p:nvSpPr>
+          <p:cNvPr id="30" name="TextBox 29"/>
+          <p:cNvSpPr txBox="1"/>
+          <p:nvPr/>
+        </p:nvSpPr>
+        <p:spPr>
+          <a:xfrm>
+            <a:off x="7571232" y="2642616"/>
+            <a:ext cx="1042416" cy="411480"/>
           </a:xfrm>
           <a:prstGeom prst="rect">
             <a:avLst/>
@@ -4611,6 +4689,45 @@
                 </a:solidFill>
                 <a:latin typeface="Calibri"/>
               </a:rPr>
+              <a:t>12 %</a:t>
+            </a:r>
+          </a:p>
+        </p:txBody>
+      </p:sp>
+      <p:sp>
+        <p:nvSpPr>
+          <p:cNvPr id="31" name="TextBox 30"/>
+          <p:cNvSpPr txBox="1"/>
+          <p:nvPr/>
+        </p:nvSpPr>
+        <p:spPr>
+          <a:xfrm>
+            <a:off x="8759952" y="2642616"/>
+            <a:ext cx="1225296" cy="411480"/>
+          </a:xfrm>
+          <a:prstGeom prst="rect">
+            <a:avLst/>
+          </a:prstGeom>
+          <a:noFill/>
+        </p:spPr>
+        <p:txBody>
+          <a:bodyPr wrap="square" lIns="0" rIns="0" tIns="18288" bIns="18288" anchor="t">
+            <a:spAutoFit/>
+          </a:bodyPr>
+          <a:lstStyle/>
+          <a:p>
+            <a:pPr algn="ctr">
+              <a:spcAft>
+                <a:spcPts val="400"/>
+              </a:spcAft>
+            </a:pPr>
+            <a:r>
+              <a:rPr sz="1300" b="0">
+                <a:solidFill>
+                  <a:srgbClr val="1A1A1A"/>
+                </a:solidFill>
+                <a:latin typeface="Calibri"/>
+              </a:rPr>
               <a:t>8 %</a:t>
             </a:r>
           </a:p>
@@ -4618,14 +4735,14 @@
       </p:sp>
       <p:sp>
         <p:nvSpPr>
-          <p:cNvPr id="29" name="TextBox 28"/>
-          <p:cNvSpPr txBox="1"/>
-          <p:nvPr/>
-        </p:nvSpPr>
-        <p:spPr>
-          <a:xfrm>
-            <a:off x="9326880" y="2596896"/>
-            <a:ext cx="914400" cy="411480"/>
+          <p:cNvPr id="32" name="TextBox 31"/>
+          <p:cNvSpPr txBox="1"/>
+          <p:nvPr/>
+        </p:nvSpPr>
+        <p:spPr>
+          <a:xfrm>
+            <a:off x="10131552" y="2642616"/>
+            <a:ext cx="676656" cy="411480"/>
           </a:xfrm>
           <a:prstGeom prst="rect">
             <a:avLst/>
@@ -4657,14 +4774,14 @@
       </p:sp>
       <p:sp>
         <p:nvSpPr>
-          <p:cNvPr id="30" name="TextBox 29"/>
-          <p:cNvSpPr txBox="1"/>
-          <p:nvPr/>
-        </p:nvSpPr>
-        <p:spPr>
-          <a:xfrm>
-            <a:off x="10424159" y="2596896"/>
-            <a:ext cx="1133856" cy="411480"/>
+          <p:cNvPr id="33" name="TextBox 32"/>
+          <p:cNvSpPr txBox="1"/>
+          <p:nvPr/>
+        </p:nvSpPr>
+        <p:spPr>
+          <a:xfrm>
+            <a:off x="10954512" y="2642616"/>
+            <a:ext cx="621792" cy="411480"/>
           </a:xfrm>
           <a:prstGeom prst="rect">
             <a:avLst/>
@@ -4696,13 +4813,13 @@
       </p:sp>
       <p:sp>
         <p:nvSpPr>
-          <p:cNvPr id="31" name="Rectangle 30"/>
+          <p:cNvPr id="34" name="Rectangle 33"/>
           <p:cNvSpPr/>
           <p:nvPr/>
         </p:nvSpPr>
         <p:spPr>
           <a:xfrm>
-            <a:off x="548640" y="3054096"/>
+            <a:off x="548640" y="3099815"/>
             <a:ext cx="11100816" cy="566928"/>
           </a:xfrm>
           <a:prstGeom prst="rect">
@@ -4738,14 +4855,14 @@
       </p:sp>
       <p:sp>
         <p:nvSpPr>
-          <p:cNvPr id="32" name="TextBox 31"/>
-          <p:cNvSpPr txBox="1"/>
-          <p:nvPr/>
-        </p:nvSpPr>
-        <p:spPr>
-          <a:xfrm>
-            <a:off x="640080" y="3163824"/>
-            <a:ext cx="2834639" cy="411480"/>
+          <p:cNvPr id="35" name="TextBox 34"/>
+          <p:cNvSpPr txBox="1"/>
+          <p:nvPr/>
+        </p:nvSpPr>
+        <p:spPr>
+          <a:xfrm>
+            <a:off x="621792" y="3209544"/>
+            <a:ext cx="2688336" cy="411480"/>
           </a:xfrm>
           <a:prstGeom prst="rect">
             <a:avLst/>
@@ -4777,14 +4894,14 @@
       </p:sp>
       <p:sp>
         <p:nvSpPr>
-          <p:cNvPr id="33" name="TextBox 32"/>
-          <p:cNvSpPr txBox="1"/>
-          <p:nvPr/>
-        </p:nvSpPr>
-        <p:spPr>
-          <a:xfrm>
-            <a:off x="3657600" y="3163824"/>
-            <a:ext cx="1417320" cy="411480"/>
+          <p:cNvPr id="36" name="TextBox 35"/>
+          <p:cNvSpPr txBox="1"/>
+          <p:nvPr/>
+        </p:nvSpPr>
+        <p:spPr>
+          <a:xfrm>
+            <a:off x="3456432" y="3209544"/>
+            <a:ext cx="1316736" cy="411480"/>
           </a:xfrm>
           <a:prstGeom prst="rect">
             <a:avLst/>
@@ -4809,21 +4926,21 @@
                 </a:solidFill>
                 <a:latin typeface="Calibri"/>
               </a:rPr>
-              <a:t>53 %</a:t>
-            </a:r>
-          </a:p>
-        </p:txBody>
-      </p:sp>
-      <p:sp>
-        <p:nvSpPr>
-          <p:cNvPr id="34" name="TextBox 33"/>
-          <p:cNvSpPr txBox="1"/>
-          <p:nvPr/>
-        </p:nvSpPr>
-        <p:spPr>
-          <a:xfrm>
-            <a:off x="5257800" y="3163824"/>
-            <a:ext cx="1234440" cy="411480"/>
+              <a:t>76 %</a:t>
+            </a:r>
+          </a:p>
+        </p:txBody>
+      </p:sp>
+      <p:sp>
+        <p:nvSpPr>
+          <p:cNvPr id="37" name="TextBox 36"/>
+          <p:cNvSpPr txBox="1"/>
+          <p:nvPr/>
+        </p:nvSpPr>
+        <p:spPr>
+          <a:xfrm>
+            <a:off x="4919472" y="3209544"/>
+            <a:ext cx="1179576" cy="411480"/>
           </a:xfrm>
           <a:prstGeom prst="rect">
             <a:avLst/>
@@ -4848,21 +4965,21 @@
                 </a:solidFill>
                 <a:latin typeface="Calibri"/>
               </a:rPr>
-              <a:t>92 %</a:t>
-            </a:r>
-          </a:p>
-        </p:txBody>
-      </p:sp>
-      <p:sp>
-        <p:nvSpPr>
-          <p:cNvPr id="35" name="TextBox 34"/>
-          <p:cNvSpPr txBox="1"/>
-          <p:nvPr/>
-        </p:nvSpPr>
-        <p:spPr>
-          <a:xfrm>
-            <a:off x="6675120" y="3163824"/>
-            <a:ext cx="960120" cy="411480"/>
+              <a:t>100 %</a:t>
+            </a:r>
+          </a:p>
+        </p:txBody>
+      </p:sp>
+      <p:sp>
+        <p:nvSpPr>
+          <p:cNvPr id="38" name="TextBox 37"/>
+          <p:cNvSpPr txBox="1"/>
+          <p:nvPr/>
+        </p:nvSpPr>
+        <p:spPr>
+          <a:xfrm>
+            <a:off x="6245352" y="3209544"/>
+            <a:ext cx="1179576" cy="411480"/>
           </a:xfrm>
           <a:prstGeom prst="rect">
             <a:avLst/>
@@ -4887,21 +5004,21 @@
                 </a:solidFill>
                 <a:latin typeface="Calibri"/>
               </a:rPr>
-              <a:t>22 %</a:t>
-            </a:r>
-          </a:p>
-        </p:txBody>
-      </p:sp>
-      <p:sp>
-        <p:nvSpPr>
-          <p:cNvPr id="36" name="TextBox 35"/>
-          <p:cNvSpPr txBox="1"/>
-          <p:nvPr/>
-        </p:nvSpPr>
-        <p:spPr>
-          <a:xfrm>
-            <a:off x="7818119" y="3163824"/>
-            <a:ext cx="1325880" cy="411480"/>
+              <a:t>0 %</a:t>
+            </a:r>
+          </a:p>
+        </p:txBody>
+      </p:sp>
+      <p:sp>
+        <p:nvSpPr>
+          <p:cNvPr id="39" name="TextBox 38"/>
+          <p:cNvSpPr txBox="1"/>
+          <p:nvPr/>
+        </p:nvSpPr>
+        <p:spPr>
+          <a:xfrm>
+            <a:off x="7571232" y="3209544"/>
+            <a:ext cx="1042416" cy="411480"/>
           </a:xfrm>
           <a:prstGeom prst="rect">
             <a:avLst/>
@@ -4926,6 +5043,45 @@
                 </a:solidFill>
                 <a:latin typeface="Calibri"/>
               </a:rPr>
+              <a:t>4 %</a:t>
+            </a:r>
+          </a:p>
+        </p:txBody>
+      </p:sp>
+      <p:sp>
+        <p:nvSpPr>
+          <p:cNvPr id="40" name="TextBox 39"/>
+          <p:cNvSpPr txBox="1"/>
+          <p:nvPr/>
+        </p:nvSpPr>
+        <p:spPr>
+          <a:xfrm>
+            <a:off x="8759952" y="3209544"/>
+            <a:ext cx="1225296" cy="411480"/>
+          </a:xfrm>
+          <a:prstGeom prst="rect">
+            <a:avLst/>
+          </a:prstGeom>
+          <a:noFill/>
+        </p:spPr>
+        <p:txBody>
+          <a:bodyPr wrap="square" lIns="0" rIns="0" tIns="18288" bIns="18288" anchor="t">
+            <a:spAutoFit/>
+          </a:bodyPr>
+          <a:lstStyle/>
+          <a:p>
+            <a:pPr algn="ctr">
+              <a:spcAft>
+                <a:spcPts val="400"/>
+              </a:spcAft>
+            </a:pPr>
+            <a:r>
+              <a:rPr sz="1300" b="0">
+                <a:solidFill>
+                  <a:srgbClr val="1A1A1A"/>
+                </a:solidFill>
+                <a:latin typeface="Calibri"/>
+              </a:rPr>
               <a:t>0 %</a:t>
             </a:r>
           </a:p>
@@ -4933,14 +5089,14 @@
       </p:sp>
       <p:sp>
         <p:nvSpPr>
-          <p:cNvPr id="37" name="TextBox 36"/>
-          <p:cNvSpPr txBox="1"/>
-          <p:nvPr/>
-        </p:nvSpPr>
-        <p:spPr>
-          <a:xfrm>
-            <a:off x="9326880" y="3163824"/>
-            <a:ext cx="914400" cy="411480"/>
+          <p:cNvPr id="41" name="TextBox 40"/>
+          <p:cNvSpPr txBox="1"/>
+          <p:nvPr/>
+        </p:nvSpPr>
+        <p:spPr>
+          <a:xfrm>
+            <a:off x="10131552" y="3209544"/>
+            <a:ext cx="676656" cy="411480"/>
           </a:xfrm>
           <a:prstGeom prst="rect">
             <a:avLst/>
@@ -4965,21 +5121,21 @@
                 </a:solidFill>
                 <a:latin typeface="Calibri"/>
               </a:rPr>
-              <a:t>4,2</a:t>
-            </a:r>
-          </a:p>
-        </p:txBody>
-      </p:sp>
-      <p:sp>
-        <p:nvSpPr>
-          <p:cNvPr id="38" name="TextBox 37"/>
-          <p:cNvSpPr txBox="1"/>
-          <p:nvPr/>
-        </p:nvSpPr>
-        <p:spPr>
-          <a:xfrm>
-            <a:off x="10424159" y="3163824"/>
-            <a:ext cx="1133856" cy="411480"/>
+              <a:t>4,5</a:t>
+            </a:r>
+          </a:p>
+        </p:txBody>
+      </p:sp>
+      <p:sp>
+        <p:nvSpPr>
+          <p:cNvPr id="42" name="TextBox 41"/>
+          <p:cNvSpPr txBox="1"/>
+          <p:nvPr/>
+        </p:nvSpPr>
+        <p:spPr>
+          <a:xfrm>
+            <a:off x="10954512" y="3209544"/>
+            <a:ext cx="621792" cy="411480"/>
           </a:xfrm>
           <a:prstGeom prst="rect">
             <a:avLst/>
@@ -5004,21 +5160,21 @@
                 </a:solidFill>
                 <a:latin typeface="Calibri"/>
               </a:rPr>
-              <a:t>37 с</a:t>
-            </a:r>
-          </a:p>
-        </p:txBody>
-      </p:sp>
-      <p:sp>
-        <p:nvSpPr>
-          <p:cNvPr id="39" name="TextBox 38"/>
-          <p:cNvSpPr txBox="1"/>
-          <p:nvPr/>
-        </p:nvSpPr>
-        <p:spPr>
-          <a:xfrm>
-            <a:off x="548640" y="3703320"/>
-            <a:ext cx="11100816" cy="548640"/>
+              <a:t>38 с</a:t>
+            </a:r>
+          </a:p>
+        </p:txBody>
+      </p:sp>
+      <p:sp>
+        <p:nvSpPr>
+          <p:cNvPr id="43" name="TextBox 42"/>
+          <p:cNvSpPr txBox="1"/>
+          <p:nvPr/>
+        </p:nvSpPr>
+        <p:spPr>
+          <a:xfrm>
+            <a:off x="548640" y="3749039"/>
+            <a:ext cx="11100816" cy="685800"/>
           </a:xfrm>
           <a:prstGeom prst="rect">
             <a:avLst/>
@@ -5043,25 +5199,25 @@
                 </a:solidFill>
                 <a:latin typeface="Calibri"/>
               </a:rPr>
-              <a:t>Целевая модель проваливается на форме, а не на фактах: с промптом v1 в 18 ответах из 50 нет даты отчёта, в 22 не названы обязательные факты. Промпт v2 с проверками формы кодом: дата есть в 49 из 50, пропусков критичных фактов ноль, оценок 5 у судьи 40 из 50 вместо 22. Хуже стало с вопросами «можно ли давать отсрочку»: короткий ответ без рекомендации, это следующая правка.</a:t>
-            </a:r>
-          </a:p>
-        </p:txBody>
-      </p:sp>
-      <p:sp>
-        <p:nvSpPr>
-          <p:cNvPr id="40" name="Rounded Rectangle 39"/>
+              <a:t>Подтверждаемый ответ: все ссылки на отчёт сходятся с данными и судья ставит не ниже 4. Выдуманный факт: судья, который видит данные из отчёта, нашёл в ответе то, чего в них нет. Неверная ссылка: число верное, но адрес поля не тот. С первым промптом дешёвая модель проваливалась на форме: в 18 ответах из 50 не было даты, обязательные факты не названы в 22. С промптом v2 и проверками кодом она вышла на уровень контрольной модели при вчетверо меньшем времени ответа.</a:t>
+            </a:r>
+          </a:p>
+        </p:txBody>
+      </p:sp>
+      <p:sp>
+        <p:nvSpPr>
+          <p:cNvPr id="44" name="Rounded Rectangle 43"/>
           <p:cNvSpPr/>
           <p:nvPr/>
         </p:nvSpPr>
         <p:spPr>
           <a:xfrm>
-            <a:off x="548640" y="4526280"/>
-            <a:ext cx="11100816" cy="1554480"/>
+            <a:off x="548640" y="4617720"/>
+            <a:ext cx="11100816" cy="1463040"/>
           </a:xfrm>
           <a:prstGeom prst="roundRect">
             <a:avLst>
-              <a:gd name="adj" fmla="val 7058"/>
+              <a:gd name="adj" fmla="val 7500"/>
             </a:avLst>
           </a:prstGeom>
           <a:solidFill>
@@ -5094,14 +5250,14 @@
       </p:sp>
       <p:sp>
         <p:nvSpPr>
-          <p:cNvPr id="41" name="TextBox 40"/>
-          <p:cNvSpPr txBox="1"/>
-          <p:nvPr/>
-        </p:nvSpPr>
-        <p:spPr>
-          <a:xfrm>
-            <a:off x="822959" y="4690872"/>
-            <a:ext cx="10552176" cy="1280160"/>
+          <p:cNvPr id="45" name="TextBox 44"/>
+          <p:cNvSpPr txBox="1"/>
+          <p:nvPr/>
+        </p:nvSpPr>
+        <p:spPr>
+          <a:xfrm>
+            <a:off x="822959" y="4782312"/>
+            <a:ext cx="10552176" cy="1188720"/>
           </a:xfrm>
           <a:prstGeom prst="rect">
             <a:avLst/>
@@ -5126,7 +5282,7 @@
                 </a:solidFill>
                 <a:latin typeface="Calibri"/>
               </a:rPr>
-              <a:t>Что с этим делаем</a:t>
+              <a:t>Что за этим стоит</a:t>
             </a:r>
           </a:p>
           <a:p>
@@ -5142,7 +5298,7 @@
                 </a:solidFill>
                 <a:latin typeface="Calibri"/>
               </a:rPr>
-              <a:t>Всё, что модель забывает или путает, ловит код: пустой ответ, категоричную фразу, сводку вместо ответа на вопрос, ссылку на пустое или, наоборот, заполненное поле. Промпт v2 стал короче и жёстче: рекомендацию модель не выбирает, «не найдено» вместо «нет», отдельные правила про суды и приставов. Первые двадцать вопросов эталона нашли больше ошибок в самом тестировании, чем в агенте, все закрыты тестами.</a:t>
+              <a:t>Всё, что модель забывает или путает, ловит код: пустой ответ, категоричную фразу, сводку вместо ответа на вопрос, ссылку на пустое или, наоборот, заполненное поле. Первые двадцать вопросов эталона нашли больше ошибок в самом тестировании, чем в агенте, все закрыты тестами. Осталось: три пропуска второстепенных фактов по судье и две ссылки на неверные суммы из сводки судов.</a:t>
             </a:r>
           </a:p>
         </p:txBody>
@@ -7882,7 +8038,7 @@
                 </a:solidFill>
                 <a:latin typeface="Calibri"/>
               </a:rPr>
-              <a:t>Сделано: сквозной прототип, 198 тестов, эталон из 50 вопросов</a:t>
+              <a:t>Сделано: сквозной прототип, 199 тестов, эталон из 50 вопросов</a:t>
             </a:r>
           </a:p>
           <a:p>
@@ -12593,7 +12749,7 @@
                 </a:solidFill>
                 <a:latin typeface="Calibri"/>
               </a:rPr>
-              <a:t>198 автоматических тестов</a:t>
+              <a:t>199 автоматических тестов</a:t>
             </a:r>
           </a:p>
           <a:p>

--- a/deliverables/interim/PRESENTATION_INTERIM.pptx
+++ b/deliverables/interim/PRESENTATION_INTERIM.pptx
@@ -8471,7 +8471,7 @@
                 </a:solidFill>
                 <a:latin typeface="Calibri"/>
               </a:rPr>
-              <a:t>У 6 компаний из 200 в тестовой выгрузке оценка сверху зелёная, а внизу отчёта написано: банкрот или исключается из реестра. Готовые подсказки в отчёте об этом молчат.</a:t>
+              <a:t>У 3 компаний из 200 в тестовой выгрузке оценка сверху зелёная, а внизу отчёта написано: банкрот или исключается из реестра. Ещё у трёх переезд или уменьшение капитала. Готовые подсказки в отчёте об этом молчат.</a:t>
             </a:r>
           </a:p>
         </p:txBody>
@@ -10311,7 +10311,7 @@
                 </a:solidFill>
                 <a:latin typeface="Calibri"/>
               </a:rPr>
-              <a:t>Таких компаний 6 из 200 отчётов в тестовой выгрузке</a:t>
+              <a:t>Таких компаний 3 из 200 отчётов в тестовой выгрузке</a:t>
             </a:r>
           </a:p>
           <a:p>
@@ -12357,7 +12357,7 @@
                 </a:solidFill>
                 <a:latin typeface="Calibri"/>
               </a:rPr>
-              <a:t>все 6 компаний с зелёной оценкой и банкротством или исключением из реестра получили вывод «работать только на условиях»</a:t>
+              <a:t>все 3 компании с зелёной оценкой и банкротством или исключением из реестра получили вывод «работать только на условиях»</a:t>
             </a:r>
           </a:p>
         </p:txBody>
